--- a/Лекции/pptx/Лекция5-ПГП-2025.pptx
+++ b/Лекции/pptx/Лекция5-ПГП-2025.pptx
@@ -29,6 +29,8 @@
     <p:sldId id="273" r:id="rId24"/>
     <p:sldId id="274" r:id="rId25"/>
     <p:sldId id="275" r:id="rId26"/>
+    <p:sldId id="276" r:id="rId27"/>
+    <p:sldId id="277" r:id="rId28"/>
   </p:sldIdLst>
   <p:sldSz cy="5143500" cx="9144000"/>
   <p:notesSz cx="6858000" cy="9144000"/>
@@ -2013,6 +2015,204 @@
       <p:sp>
         <p:nvSpPr>
           <p:cNvPr id="176" name="Google Shape;176;g20f3b9f2b19_0_93:notes"/>
+          <p:cNvSpPr txBox="1"/>
+          <p:nvPr>
+            <p:ph idx="1" type="body"/>
+          </p:nvPr>
+        </p:nvSpPr>
+        <p:spPr>
+          <a:xfrm>
+            <a:off x="685800" y="4343400"/>
+            <a:ext cx="5486400" cy="4114800"/>
+          </a:xfrm>
+          <a:prstGeom prst="rect">
+            <a:avLst/>
+          </a:prstGeom>
+        </p:spPr>
+        <p:txBody>
+          <a:bodyPr anchorCtr="0" anchor="t" bIns="91425" lIns="91425" spcFirstLastPara="1" rIns="91425" wrap="square" tIns="91425">
+            <a:noAutofit/>
+          </a:bodyPr>
+          <a:lstStyle/>
+          <a:p>
+            <a:pPr indent="0" lvl="0" marL="0" rtl="0" algn="l">
+              <a:spcBef>
+                <a:spcPts val="0"/>
+              </a:spcBef>
+              <a:spcAft>
+                <a:spcPts val="0"/>
+              </a:spcAft>
+              <a:buNone/>
+            </a:pPr>
+            <a:r>
+              <a:t/>
+            </a:r>
+            <a:endParaRPr/>
+          </a:p>
+        </p:txBody>
+      </p:sp>
+    </p:spTree>
+  </p:cSld>
+  <p:clrMapOvr>
+    <a:masterClrMapping/>
+  </p:clrMapOvr>
+</p:notes>
+</file>
+
+<file path=ppt/notesSlides/notesSlide21.xml><?xml version="1.0" encoding="utf-8"?>
+<p:notes xmlns:a="http://schemas.openxmlformats.org/drawingml/2006/main" xmlns:r="http://schemas.openxmlformats.org/officeDocument/2006/relationships" xmlns:mc="http://schemas.openxmlformats.org/markup-compatibility/2006" xmlns:mv="urn:schemas-microsoft-com:mac:vml" xmlns:p="http://schemas.openxmlformats.org/presentationml/2006/main" xmlns:c="http://schemas.openxmlformats.org/drawingml/2006/chart" xmlns:dgm="http://schemas.openxmlformats.org/drawingml/2006/diagram" xmlns:o="urn:schemas-microsoft-com:office:office" xmlns:v="urn:schemas-microsoft-com:vml" xmlns:pvml="urn:schemas-microsoft-com:office:powerpoint" xmlns:com="http://schemas.openxmlformats.org/drawingml/2006/compatibility" xmlns:p14="http://schemas.microsoft.com/office/powerpoint/2010/main" xmlns:p15="http://schemas.microsoft.com/office/powerpoint/2012/main" xmlns:ahyp="http://schemas.microsoft.com/office/drawing/2018/hyperlinkcolor" showMasterPhAnim="0" showMasterSp="0">
+  <p:cSld>
+    <p:spTree>
+      <p:nvGrpSpPr>
+        <p:cNvPr id="179" name="Shape 179"/>
+        <p:cNvGrpSpPr/>
+        <p:nvPr/>
+      </p:nvGrpSpPr>
+      <p:grpSpPr>
+        <a:xfrm>
+          <a:off x="0" y="0"/>
+          <a:ext cx="0" cy="0"/>
+          <a:chOff x="0" y="0"/>
+          <a:chExt cx="0" cy="0"/>
+        </a:xfrm>
+      </p:grpSpPr>
+      <p:sp>
+        <p:nvSpPr>
+          <p:cNvPr id="180" name="Google Shape;180;g33bd3c8bfac_0_3:notes"/>
+          <p:cNvSpPr/>
+          <p:nvPr>
+            <p:ph idx="2" type="sldImg"/>
+          </p:nvPr>
+        </p:nvSpPr>
+        <p:spPr>
+          <a:xfrm>
+            <a:off x="381300" y="685800"/>
+            <a:ext cx="6096000" cy="3429000"/>
+          </a:xfrm>
+          <a:custGeom>
+            <a:rect b="b" l="l" r="r" t="t"/>
+            <a:pathLst>
+              <a:path extrusionOk="0" h="120000" w="120000">
+                <a:moveTo>
+                  <a:pt x="0" y="0"/>
+                </a:moveTo>
+                <a:lnTo>
+                  <a:pt x="120000" y="0"/>
+                </a:lnTo>
+                <a:lnTo>
+                  <a:pt x="120000" y="120000"/>
+                </a:lnTo>
+                <a:lnTo>
+                  <a:pt x="0" y="120000"/>
+                </a:lnTo>
+                <a:close/>
+              </a:path>
+            </a:pathLst>
+          </a:custGeom>
+        </p:spPr>
+      </p:sp>
+      <p:sp>
+        <p:nvSpPr>
+          <p:cNvPr id="181" name="Google Shape;181;g33bd3c8bfac_0_3:notes"/>
+          <p:cNvSpPr txBox="1"/>
+          <p:nvPr>
+            <p:ph idx="1" type="body"/>
+          </p:nvPr>
+        </p:nvSpPr>
+        <p:spPr>
+          <a:xfrm>
+            <a:off x="685800" y="4343400"/>
+            <a:ext cx="5486400" cy="4114800"/>
+          </a:xfrm>
+          <a:prstGeom prst="rect">
+            <a:avLst/>
+          </a:prstGeom>
+        </p:spPr>
+        <p:txBody>
+          <a:bodyPr anchorCtr="0" anchor="t" bIns="91425" lIns="91425" spcFirstLastPara="1" rIns="91425" wrap="square" tIns="91425">
+            <a:noAutofit/>
+          </a:bodyPr>
+          <a:lstStyle/>
+          <a:p>
+            <a:pPr indent="0" lvl="0" marL="0" rtl="0" algn="l">
+              <a:spcBef>
+                <a:spcPts val="0"/>
+              </a:spcBef>
+              <a:spcAft>
+                <a:spcPts val="0"/>
+              </a:spcAft>
+              <a:buNone/>
+            </a:pPr>
+            <a:r>
+              <a:t/>
+            </a:r>
+            <a:endParaRPr/>
+          </a:p>
+        </p:txBody>
+      </p:sp>
+    </p:spTree>
+  </p:cSld>
+  <p:clrMapOvr>
+    <a:masterClrMapping/>
+  </p:clrMapOvr>
+</p:notes>
+</file>
+
+<file path=ppt/notesSlides/notesSlide22.xml><?xml version="1.0" encoding="utf-8"?>
+<p:notes xmlns:a="http://schemas.openxmlformats.org/drawingml/2006/main" xmlns:r="http://schemas.openxmlformats.org/officeDocument/2006/relationships" xmlns:mc="http://schemas.openxmlformats.org/markup-compatibility/2006" xmlns:mv="urn:schemas-microsoft-com:mac:vml" xmlns:p="http://schemas.openxmlformats.org/presentationml/2006/main" xmlns:c="http://schemas.openxmlformats.org/drawingml/2006/chart" xmlns:dgm="http://schemas.openxmlformats.org/drawingml/2006/diagram" xmlns:o="urn:schemas-microsoft-com:office:office" xmlns:v="urn:schemas-microsoft-com:vml" xmlns:pvml="urn:schemas-microsoft-com:office:powerpoint" xmlns:com="http://schemas.openxmlformats.org/drawingml/2006/compatibility" xmlns:p14="http://schemas.microsoft.com/office/powerpoint/2010/main" xmlns:p15="http://schemas.microsoft.com/office/powerpoint/2012/main" xmlns:ahyp="http://schemas.microsoft.com/office/drawing/2018/hyperlinkcolor" showMasterPhAnim="0" showMasterSp="0">
+  <p:cSld>
+    <p:spTree>
+      <p:nvGrpSpPr>
+        <p:cNvPr id="227" name="Shape 227"/>
+        <p:cNvGrpSpPr/>
+        <p:nvPr/>
+      </p:nvGrpSpPr>
+      <p:grpSpPr>
+        <a:xfrm>
+          <a:off x="0" y="0"/>
+          <a:ext cx="0" cy="0"/>
+          <a:chOff x="0" y="0"/>
+          <a:chExt cx="0" cy="0"/>
+        </a:xfrm>
+      </p:grpSpPr>
+      <p:sp>
+        <p:nvSpPr>
+          <p:cNvPr id="228" name="Google Shape;228;g33bd3c8bfac_0_49:notes"/>
+          <p:cNvSpPr/>
+          <p:nvPr>
+            <p:ph idx="2" type="sldImg"/>
+          </p:nvPr>
+        </p:nvSpPr>
+        <p:spPr>
+          <a:xfrm>
+            <a:off x="381300" y="685800"/>
+            <a:ext cx="6096000" cy="3429000"/>
+          </a:xfrm>
+          <a:custGeom>
+            <a:rect b="b" l="l" r="r" t="t"/>
+            <a:pathLst>
+              <a:path extrusionOk="0" h="120000" w="120000">
+                <a:moveTo>
+                  <a:pt x="0" y="0"/>
+                </a:moveTo>
+                <a:lnTo>
+                  <a:pt x="120000" y="0"/>
+                </a:lnTo>
+                <a:lnTo>
+                  <a:pt x="120000" y="120000"/>
+                </a:lnTo>
+                <a:lnTo>
+                  <a:pt x="0" y="120000"/>
+                </a:lnTo>
+                <a:close/>
+              </a:path>
+            </a:pathLst>
+          </a:custGeom>
+        </p:spPr>
+      </p:sp>
+      <p:sp>
+        <p:nvSpPr>
+          <p:cNvPr id="229" name="Google Shape;229;g33bd3c8bfac_0_49:notes"/>
           <p:cNvSpPr txBox="1"/>
           <p:nvPr>
             <p:ph idx="1" type="body"/>
@@ -15770,6 +15970,3433 @@
 </p:sld>
 </file>
 
+<file path=ppt/slides/slide21.xml><?xml version="1.0" encoding="utf-8"?>
+<p:sld xmlns:a="http://schemas.openxmlformats.org/drawingml/2006/main" xmlns:r="http://schemas.openxmlformats.org/officeDocument/2006/relationships" xmlns:mc="http://schemas.openxmlformats.org/markup-compatibility/2006" xmlns:mv="urn:schemas-microsoft-com:mac:vml" xmlns:p="http://schemas.openxmlformats.org/presentationml/2006/main" xmlns:c="http://schemas.openxmlformats.org/drawingml/2006/chart" xmlns:dgm="http://schemas.openxmlformats.org/drawingml/2006/diagram" xmlns:o="urn:schemas-microsoft-com:office:office" xmlns:v="urn:schemas-microsoft-com:vml" xmlns:pvml="urn:schemas-microsoft-com:office:powerpoint" xmlns:com="http://schemas.openxmlformats.org/drawingml/2006/compatibility" xmlns:p14="http://schemas.microsoft.com/office/powerpoint/2010/main" xmlns:p15="http://schemas.microsoft.com/office/powerpoint/2012/main" xmlns:ahyp="http://schemas.microsoft.com/office/drawing/2018/hyperlinkcolor">
+  <p:cSld>
+    <p:spTree>
+      <p:nvGrpSpPr>
+        <p:cNvPr id="182" name="Shape 182"/>
+        <p:cNvGrpSpPr/>
+        <p:nvPr/>
+      </p:nvGrpSpPr>
+      <p:grpSpPr>
+        <a:xfrm>
+          <a:off x="0" y="0"/>
+          <a:ext cx="0" cy="0"/>
+          <a:chOff x="0" y="0"/>
+          <a:chExt cx="0" cy="0"/>
+        </a:xfrm>
+      </p:grpSpPr>
+      <p:grpSp>
+        <p:nvGrpSpPr>
+          <p:cNvPr id="183" name="Google Shape;183;p35"/>
+          <p:cNvGrpSpPr/>
+          <p:nvPr/>
+        </p:nvGrpSpPr>
+        <p:grpSpPr>
+          <a:xfrm>
+            <a:off x="936875" y="2489200"/>
+            <a:ext cx="6735900" cy="475800"/>
+            <a:chOff x="251075" y="965200"/>
+            <a:chExt cx="6735900" cy="475800"/>
+          </a:xfrm>
+        </p:grpSpPr>
+        <p:grpSp>
+          <p:nvGrpSpPr>
+            <p:cNvPr id="184" name="Google Shape;184;p35"/>
+            <p:cNvGrpSpPr/>
+            <p:nvPr/>
+          </p:nvGrpSpPr>
+          <p:grpSpPr>
+            <a:xfrm>
+              <a:off x="251075" y="965200"/>
+              <a:ext cx="2168400" cy="475800"/>
+              <a:chOff x="251075" y="965200"/>
+              <a:chExt cx="2168400" cy="475800"/>
+            </a:xfrm>
+          </p:grpSpPr>
+          <p:sp>
+            <p:nvSpPr>
+              <p:cNvPr id="185" name="Google Shape;185;p35"/>
+              <p:cNvSpPr/>
+              <p:nvPr/>
+            </p:nvSpPr>
+            <p:spPr>
+              <a:xfrm>
+                <a:off x="251075" y="965200"/>
+                <a:ext cx="568200" cy="475800"/>
+              </a:xfrm>
+              <a:prstGeom prst="rect">
+                <a:avLst/>
+              </a:prstGeom>
+              <a:solidFill>
+                <a:srgbClr val="D9EAD3"/>
+              </a:solidFill>
+              <a:ln cap="flat" cmpd="sng" w="9525">
+                <a:solidFill>
+                  <a:schemeClr val="dk2"/>
+                </a:solidFill>
+                <a:prstDash val="solid"/>
+                <a:round/>
+                <a:headEnd len="sm" w="sm" type="none"/>
+                <a:tailEnd len="sm" w="sm" type="none"/>
+              </a:ln>
+            </p:spPr>
+            <p:txBody>
+              <a:bodyPr anchorCtr="0" anchor="ctr" bIns="91425" lIns="91425" spcFirstLastPara="1" rIns="91425" wrap="square" tIns="91425">
+                <a:noAutofit/>
+              </a:bodyPr>
+              <a:lstStyle/>
+              <a:p>
+                <a:pPr indent="0" lvl="0" marL="0" rtl="0" algn="l">
+                  <a:spcBef>
+                    <a:spcPts val="0"/>
+                  </a:spcBef>
+                  <a:spcAft>
+                    <a:spcPts val="0"/>
+                  </a:spcAft>
+                  <a:buNone/>
+                </a:pPr>
+                <a:r>
+                  <a:rPr lang="en" sz="1800"/>
+                  <a:t>  a</a:t>
+                </a:r>
+                <a:r>
+                  <a:rPr baseline="-25000" lang="en" sz="1800"/>
+                  <a:t>0</a:t>
+                </a:r>
+                <a:endParaRPr baseline="-25000" sz="1800"/>
+              </a:p>
+            </p:txBody>
+          </p:sp>
+          <p:sp>
+            <p:nvSpPr>
+              <p:cNvPr id="186" name="Google Shape;186;p35"/>
+              <p:cNvSpPr/>
+              <p:nvPr/>
+            </p:nvSpPr>
+            <p:spPr>
+              <a:xfrm>
+                <a:off x="784475" y="965200"/>
+                <a:ext cx="568200" cy="475800"/>
+              </a:xfrm>
+              <a:prstGeom prst="rect">
+                <a:avLst/>
+              </a:prstGeom>
+              <a:solidFill>
+                <a:srgbClr val="D9EAD3"/>
+              </a:solidFill>
+              <a:ln cap="flat" cmpd="sng" w="9525">
+                <a:solidFill>
+                  <a:schemeClr val="dk2"/>
+                </a:solidFill>
+                <a:prstDash val="solid"/>
+                <a:round/>
+                <a:headEnd len="sm" w="sm" type="none"/>
+                <a:tailEnd len="sm" w="sm" type="none"/>
+              </a:ln>
+            </p:spPr>
+            <p:txBody>
+              <a:bodyPr anchorCtr="0" anchor="ctr" bIns="91425" lIns="91425" spcFirstLastPara="1" rIns="91425" wrap="square" tIns="91425">
+                <a:noAutofit/>
+              </a:bodyPr>
+              <a:lstStyle/>
+              <a:p>
+                <a:pPr indent="0" lvl="0" marL="0" rtl="0" algn="l">
+                  <a:spcBef>
+                    <a:spcPts val="0"/>
+                  </a:spcBef>
+                  <a:spcAft>
+                    <a:spcPts val="0"/>
+                  </a:spcAft>
+                  <a:buNone/>
+                </a:pPr>
+                <a:r>
+                  <a:rPr lang="en" sz="1800"/>
+                  <a:t>  a</a:t>
+                </a:r>
+                <a:r>
+                  <a:rPr baseline="-25000" lang="en" sz="1800"/>
+                  <a:t>1</a:t>
+                </a:r>
+                <a:endParaRPr baseline="-25000" sz="1800"/>
+              </a:p>
+            </p:txBody>
+          </p:sp>
+          <p:sp>
+            <p:nvSpPr>
+              <p:cNvPr id="187" name="Google Shape;187;p35"/>
+              <p:cNvSpPr/>
+              <p:nvPr/>
+            </p:nvSpPr>
+            <p:spPr>
+              <a:xfrm>
+                <a:off x="1317875" y="965200"/>
+                <a:ext cx="568200" cy="475800"/>
+              </a:xfrm>
+              <a:prstGeom prst="rect">
+                <a:avLst/>
+              </a:prstGeom>
+              <a:solidFill>
+                <a:srgbClr val="D9EAD3"/>
+              </a:solidFill>
+              <a:ln cap="flat" cmpd="sng" w="9525">
+                <a:solidFill>
+                  <a:schemeClr val="dk2"/>
+                </a:solidFill>
+                <a:prstDash val="solid"/>
+                <a:round/>
+                <a:headEnd len="sm" w="sm" type="none"/>
+                <a:tailEnd len="sm" w="sm" type="none"/>
+              </a:ln>
+            </p:spPr>
+            <p:txBody>
+              <a:bodyPr anchorCtr="0" anchor="ctr" bIns="91425" lIns="91425" spcFirstLastPara="1" rIns="91425" wrap="square" tIns="91425">
+                <a:noAutofit/>
+              </a:bodyPr>
+              <a:lstStyle/>
+              <a:p>
+                <a:pPr indent="0" lvl="0" marL="0" rtl="0" algn="l">
+                  <a:spcBef>
+                    <a:spcPts val="0"/>
+                  </a:spcBef>
+                  <a:spcAft>
+                    <a:spcPts val="0"/>
+                  </a:spcAft>
+                  <a:buNone/>
+                </a:pPr>
+                <a:r>
+                  <a:rPr lang="en" sz="1800"/>
+                  <a:t>  a</a:t>
+                </a:r>
+                <a:r>
+                  <a:rPr baseline="-25000" lang="en" sz="1800"/>
+                  <a:t>2</a:t>
+                </a:r>
+                <a:endParaRPr baseline="-25000" sz="1800"/>
+              </a:p>
+            </p:txBody>
+          </p:sp>
+          <p:sp>
+            <p:nvSpPr>
+              <p:cNvPr id="188" name="Google Shape;188;p35"/>
+              <p:cNvSpPr/>
+              <p:nvPr/>
+            </p:nvSpPr>
+            <p:spPr>
+              <a:xfrm>
+                <a:off x="1851275" y="965200"/>
+                <a:ext cx="568200" cy="475800"/>
+              </a:xfrm>
+              <a:prstGeom prst="rect">
+                <a:avLst/>
+              </a:prstGeom>
+              <a:solidFill>
+                <a:srgbClr val="D9EAD3"/>
+              </a:solidFill>
+              <a:ln cap="flat" cmpd="sng" w="9525">
+                <a:solidFill>
+                  <a:schemeClr val="dk2"/>
+                </a:solidFill>
+                <a:prstDash val="solid"/>
+                <a:round/>
+                <a:headEnd len="sm" w="sm" type="none"/>
+                <a:tailEnd len="sm" w="sm" type="none"/>
+              </a:ln>
+            </p:spPr>
+            <p:txBody>
+              <a:bodyPr anchorCtr="0" anchor="ctr" bIns="91425" lIns="91425" spcFirstLastPara="1" rIns="91425" wrap="square" tIns="91425">
+                <a:noAutofit/>
+              </a:bodyPr>
+              <a:lstStyle/>
+              <a:p>
+                <a:pPr indent="0" lvl="0" marL="0" rtl="0" algn="l">
+                  <a:spcBef>
+                    <a:spcPts val="0"/>
+                  </a:spcBef>
+                  <a:spcAft>
+                    <a:spcPts val="0"/>
+                  </a:spcAft>
+                  <a:buNone/>
+                </a:pPr>
+                <a:r>
+                  <a:rPr lang="en" sz="1800"/>
+                  <a:t>  a</a:t>
+                </a:r>
+                <a:r>
+                  <a:rPr baseline="-25000" lang="en" sz="1800"/>
+                  <a:t>3</a:t>
+                </a:r>
+                <a:endParaRPr baseline="-25000" sz="1800"/>
+              </a:p>
+            </p:txBody>
+          </p:sp>
+        </p:grpSp>
+        <p:grpSp>
+          <p:nvGrpSpPr>
+            <p:cNvPr id="189" name="Google Shape;189;p35"/>
+            <p:cNvGrpSpPr/>
+            <p:nvPr/>
+          </p:nvGrpSpPr>
+          <p:grpSpPr>
+            <a:xfrm>
+              <a:off x="2460875" y="965200"/>
+              <a:ext cx="2168400" cy="475800"/>
+              <a:chOff x="251075" y="965200"/>
+              <a:chExt cx="2168400" cy="475800"/>
+            </a:xfrm>
+          </p:grpSpPr>
+          <p:sp>
+            <p:nvSpPr>
+              <p:cNvPr id="190" name="Google Shape;190;p35"/>
+              <p:cNvSpPr/>
+              <p:nvPr/>
+            </p:nvSpPr>
+            <p:spPr>
+              <a:xfrm>
+                <a:off x="251075" y="965200"/>
+                <a:ext cx="568200" cy="475800"/>
+              </a:xfrm>
+              <a:prstGeom prst="rect">
+                <a:avLst/>
+              </a:prstGeom>
+              <a:solidFill>
+                <a:srgbClr val="D9EAD3"/>
+              </a:solidFill>
+              <a:ln cap="flat" cmpd="sng" w="9525">
+                <a:solidFill>
+                  <a:schemeClr val="dk2"/>
+                </a:solidFill>
+                <a:prstDash val="solid"/>
+                <a:round/>
+                <a:headEnd len="sm" w="sm" type="none"/>
+                <a:tailEnd len="sm" w="sm" type="none"/>
+              </a:ln>
+            </p:spPr>
+            <p:txBody>
+              <a:bodyPr anchorCtr="0" anchor="ctr" bIns="91425" lIns="91425" spcFirstLastPara="1" rIns="91425" wrap="square" tIns="91425">
+                <a:noAutofit/>
+              </a:bodyPr>
+              <a:lstStyle/>
+              <a:p>
+                <a:pPr indent="0" lvl="0" marL="0" rtl="0" algn="l">
+                  <a:spcBef>
+                    <a:spcPts val="0"/>
+                  </a:spcBef>
+                  <a:spcAft>
+                    <a:spcPts val="0"/>
+                  </a:spcAft>
+                  <a:buNone/>
+                </a:pPr>
+                <a:r>
+                  <a:rPr lang="en" sz="1800"/>
+                  <a:t>  a</a:t>
+                </a:r>
+                <a:r>
+                  <a:rPr baseline="-25000" lang="en" sz="1800"/>
+                  <a:t>4</a:t>
+                </a:r>
+                <a:endParaRPr baseline="-25000" sz="1800"/>
+              </a:p>
+            </p:txBody>
+          </p:sp>
+          <p:sp>
+            <p:nvSpPr>
+              <p:cNvPr id="191" name="Google Shape;191;p35"/>
+              <p:cNvSpPr/>
+              <p:nvPr/>
+            </p:nvSpPr>
+            <p:spPr>
+              <a:xfrm>
+                <a:off x="784475" y="965200"/>
+                <a:ext cx="568200" cy="475800"/>
+              </a:xfrm>
+              <a:prstGeom prst="rect">
+                <a:avLst/>
+              </a:prstGeom>
+              <a:solidFill>
+                <a:srgbClr val="D9EAD3"/>
+              </a:solidFill>
+              <a:ln cap="flat" cmpd="sng" w="9525">
+                <a:solidFill>
+                  <a:schemeClr val="dk2"/>
+                </a:solidFill>
+                <a:prstDash val="solid"/>
+                <a:round/>
+                <a:headEnd len="sm" w="sm" type="none"/>
+                <a:tailEnd len="sm" w="sm" type="none"/>
+              </a:ln>
+            </p:spPr>
+            <p:txBody>
+              <a:bodyPr anchorCtr="0" anchor="ctr" bIns="91425" lIns="91425" spcFirstLastPara="1" rIns="91425" wrap="square" tIns="91425">
+                <a:noAutofit/>
+              </a:bodyPr>
+              <a:lstStyle/>
+              <a:p>
+                <a:pPr indent="0" lvl="0" marL="0" rtl="0" algn="l">
+                  <a:spcBef>
+                    <a:spcPts val="0"/>
+                  </a:spcBef>
+                  <a:spcAft>
+                    <a:spcPts val="0"/>
+                  </a:spcAft>
+                  <a:buNone/>
+                </a:pPr>
+                <a:r>
+                  <a:rPr lang="en" sz="1800"/>
+                  <a:t>  a</a:t>
+                </a:r>
+                <a:r>
+                  <a:rPr baseline="-25000" lang="en" sz="1800"/>
+                  <a:t>5</a:t>
+                </a:r>
+                <a:endParaRPr baseline="-25000" sz="1800"/>
+              </a:p>
+            </p:txBody>
+          </p:sp>
+          <p:sp>
+            <p:nvSpPr>
+              <p:cNvPr id="192" name="Google Shape;192;p35"/>
+              <p:cNvSpPr/>
+              <p:nvPr/>
+            </p:nvSpPr>
+            <p:spPr>
+              <a:xfrm>
+                <a:off x="1317875" y="965200"/>
+                <a:ext cx="568200" cy="475800"/>
+              </a:xfrm>
+              <a:prstGeom prst="rect">
+                <a:avLst/>
+              </a:prstGeom>
+              <a:solidFill>
+                <a:srgbClr val="D9EAD3"/>
+              </a:solidFill>
+              <a:ln cap="flat" cmpd="sng" w="9525">
+                <a:solidFill>
+                  <a:schemeClr val="dk2"/>
+                </a:solidFill>
+                <a:prstDash val="solid"/>
+                <a:round/>
+                <a:headEnd len="sm" w="sm" type="none"/>
+                <a:tailEnd len="sm" w="sm" type="none"/>
+              </a:ln>
+            </p:spPr>
+            <p:txBody>
+              <a:bodyPr anchorCtr="0" anchor="ctr" bIns="91425" lIns="91425" spcFirstLastPara="1" rIns="91425" wrap="square" tIns="91425">
+                <a:noAutofit/>
+              </a:bodyPr>
+              <a:lstStyle/>
+              <a:p>
+                <a:pPr indent="0" lvl="0" marL="0" rtl="0" algn="l">
+                  <a:spcBef>
+                    <a:spcPts val="0"/>
+                  </a:spcBef>
+                  <a:spcAft>
+                    <a:spcPts val="0"/>
+                  </a:spcAft>
+                  <a:buNone/>
+                </a:pPr>
+                <a:r>
+                  <a:rPr lang="en" sz="1800"/>
+                  <a:t>  a</a:t>
+                </a:r>
+                <a:r>
+                  <a:rPr baseline="-25000" lang="en" sz="1800"/>
+                  <a:t>6</a:t>
+                </a:r>
+                <a:endParaRPr baseline="-25000" sz="1800"/>
+              </a:p>
+            </p:txBody>
+          </p:sp>
+          <p:sp>
+            <p:nvSpPr>
+              <p:cNvPr id="193" name="Google Shape;193;p35"/>
+              <p:cNvSpPr/>
+              <p:nvPr/>
+            </p:nvSpPr>
+            <p:spPr>
+              <a:xfrm>
+                <a:off x="1851275" y="965200"/>
+                <a:ext cx="568200" cy="475800"/>
+              </a:xfrm>
+              <a:prstGeom prst="rect">
+                <a:avLst/>
+              </a:prstGeom>
+              <a:solidFill>
+                <a:srgbClr val="D9EAD3"/>
+              </a:solidFill>
+              <a:ln cap="flat" cmpd="sng" w="9525">
+                <a:solidFill>
+                  <a:schemeClr val="dk2"/>
+                </a:solidFill>
+                <a:prstDash val="solid"/>
+                <a:round/>
+                <a:headEnd len="sm" w="sm" type="none"/>
+                <a:tailEnd len="sm" w="sm" type="none"/>
+              </a:ln>
+            </p:spPr>
+            <p:txBody>
+              <a:bodyPr anchorCtr="0" anchor="ctr" bIns="91425" lIns="91425" spcFirstLastPara="1" rIns="91425" wrap="square" tIns="91425">
+                <a:noAutofit/>
+              </a:bodyPr>
+              <a:lstStyle/>
+              <a:p>
+                <a:pPr indent="0" lvl="0" marL="0" rtl="0" algn="l">
+                  <a:spcBef>
+                    <a:spcPts val="0"/>
+                  </a:spcBef>
+                  <a:spcAft>
+                    <a:spcPts val="0"/>
+                  </a:spcAft>
+                  <a:buNone/>
+                </a:pPr>
+                <a:r>
+                  <a:rPr lang="en" sz="1800"/>
+                  <a:t>  a</a:t>
+                </a:r>
+                <a:r>
+                  <a:rPr baseline="-25000" lang="en" sz="1800"/>
+                  <a:t>7</a:t>
+                </a:r>
+                <a:endParaRPr baseline="-25000" sz="1800"/>
+              </a:p>
+            </p:txBody>
+          </p:sp>
+        </p:grpSp>
+        <p:sp>
+          <p:nvSpPr>
+            <p:cNvPr id="194" name="Google Shape;194;p35"/>
+            <p:cNvSpPr/>
+            <p:nvPr/>
+          </p:nvSpPr>
+          <p:spPr>
+            <a:xfrm>
+              <a:off x="4670675" y="965200"/>
+              <a:ext cx="568200" cy="475800"/>
+            </a:xfrm>
+            <a:prstGeom prst="rect">
+              <a:avLst/>
+            </a:prstGeom>
+            <a:solidFill>
+              <a:srgbClr val="D9EAD3"/>
+            </a:solidFill>
+            <a:ln cap="flat" cmpd="sng" w="9525">
+              <a:solidFill>
+                <a:schemeClr val="dk2"/>
+              </a:solidFill>
+              <a:prstDash val="solid"/>
+              <a:round/>
+              <a:headEnd len="sm" w="sm" type="none"/>
+              <a:tailEnd len="sm" w="sm" type="none"/>
+            </a:ln>
+          </p:spPr>
+          <p:txBody>
+            <a:bodyPr anchorCtr="0" anchor="ctr" bIns="91425" lIns="91425" spcFirstLastPara="1" rIns="91425" wrap="square" tIns="91425">
+              <a:noAutofit/>
+            </a:bodyPr>
+            <a:lstStyle/>
+            <a:p>
+              <a:pPr indent="0" lvl="0" marL="0" rtl="0" algn="l">
+                <a:spcBef>
+                  <a:spcPts val="0"/>
+                </a:spcBef>
+                <a:spcAft>
+                  <a:spcPts val="0"/>
+                </a:spcAft>
+                <a:buNone/>
+              </a:pPr>
+              <a:r>
+                <a:rPr lang="en" sz="1800"/>
+                <a:t>  a</a:t>
+              </a:r>
+              <a:r>
+                <a:rPr baseline="-25000" lang="en" sz="1800"/>
+                <a:t>8</a:t>
+              </a:r>
+              <a:endParaRPr baseline="-25000" sz="1800"/>
+            </a:p>
+          </p:txBody>
+        </p:sp>
+        <p:sp>
+          <p:nvSpPr>
+            <p:cNvPr id="195" name="Google Shape;195;p35"/>
+            <p:cNvSpPr/>
+            <p:nvPr/>
+          </p:nvSpPr>
+          <p:spPr>
+            <a:xfrm>
+              <a:off x="5204075" y="965200"/>
+              <a:ext cx="568200" cy="475800"/>
+            </a:xfrm>
+            <a:prstGeom prst="rect">
+              <a:avLst/>
+            </a:prstGeom>
+            <a:solidFill>
+              <a:srgbClr val="D9EAD3"/>
+            </a:solidFill>
+            <a:ln cap="flat" cmpd="sng" w="9525">
+              <a:solidFill>
+                <a:schemeClr val="dk2"/>
+              </a:solidFill>
+              <a:prstDash val="solid"/>
+              <a:round/>
+              <a:headEnd len="sm" w="sm" type="none"/>
+              <a:tailEnd len="sm" w="sm" type="none"/>
+            </a:ln>
+          </p:spPr>
+          <p:txBody>
+            <a:bodyPr anchorCtr="0" anchor="ctr" bIns="91425" lIns="91425" spcFirstLastPara="1" rIns="91425" wrap="square" tIns="91425">
+              <a:noAutofit/>
+            </a:bodyPr>
+            <a:lstStyle/>
+            <a:p>
+              <a:pPr indent="0" lvl="0" marL="0" rtl="0" algn="l">
+                <a:spcBef>
+                  <a:spcPts val="0"/>
+                </a:spcBef>
+                <a:spcAft>
+                  <a:spcPts val="0"/>
+                </a:spcAft>
+                <a:buNone/>
+              </a:pPr>
+              <a:r>
+                <a:rPr lang="en" sz="1800"/>
+                <a:t>  a</a:t>
+              </a:r>
+              <a:r>
+                <a:rPr baseline="-25000" lang="en" sz="1800"/>
+                <a:t>9</a:t>
+              </a:r>
+              <a:endParaRPr baseline="-25000" sz="1800"/>
+            </a:p>
+          </p:txBody>
+        </p:sp>
+        <p:sp>
+          <p:nvSpPr>
+            <p:cNvPr id="196" name="Google Shape;196;p35"/>
+            <p:cNvSpPr/>
+            <p:nvPr/>
+          </p:nvSpPr>
+          <p:spPr>
+            <a:xfrm>
+              <a:off x="5737475" y="965200"/>
+              <a:ext cx="639900" cy="475800"/>
+            </a:xfrm>
+            <a:prstGeom prst="rect">
+              <a:avLst/>
+            </a:prstGeom>
+            <a:solidFill>
+              <a:srgbClr val="D9EAD3"/>
+            </a:solidFill>
+            <a:ln cap="flat" cmpd="sng" w="9525">
+              <a:solidFill>
+                <a:schemeClr val="dk2"/>
+              </a:solidFill>
+              <a:prstDash val="solid"/>
+              <a:round/>
+              <a:headEnd len="sm" w="sm" type="none"/>
+              <a:tailEnd len="sm" w="sm" type="none"/>
+            </a:ln>
+          </p:spPr>
+          <p:txBody>
+            <a:bodyPr anchorCtr="0" anchor="ctr" bIns="91425" lIns="91425" spcFirstLastPara="1" rIns="91425" wrap="square" tIns="91425">
+              <a:noAutofit/>
+            </a:bodyPr>
+            <a:lstStyle/>
+            <a:p>
+              <a:pPr indent="0" lvl="0" marL="0" rtl="0" algn="l">
+                <a:spcBef>
+                  <a:spcPts val="0"/>
+                </a:spcBef>
+                <a:spcAft>
+                  <a:spcPts val="0"/>
+                </a:spcAft>
+                <a:buNone/>
+              </a:pPr>
+              <a:r>
+                <a:rPr lang="en" sz="1800"/>
+                <a:t>  a</a:t>
+              </a:r>
+              <a:r>
+                <a:rPr baseline="-25000" lang="en" sz="1800"/>
+                <a:t>10</a:t>
+              </a:r>
+              <a:endParaRPr baseline="-25000" sz="1800"/>
+            </a:p>
+          </p:txBody>
+        </p:sp>
+        <p:sp>
+          <p:nvSpPr>
+            <p:cNvPr id="197" name="Google Shape;197;p35"/>
+            <p:cNvSpPr/>
+            <p:nvPr/>
+          </p:nvSpPr>
+          <p:spPr>
+            <a:xfrm>
+              <a:off x="6347075" y="965200"/>
+              <a:ext cx="639900" cy="475800"/>
+            </a:xfrm>
+            <a:prstGeom prst="rect">
+              <a:avLst/>
+            </a:prstGeom>
+            <a:solidFill>
+              <a:srgbClr val="D9EAD3"/>
+            </a:solidFill>
+            <a:ln cap="flat" cmpd="sng" w="9525">
+              <a:solidFill>
+                <a:schemeClr val="dk2"/>
+              </a:solidFill>
+              <a:prstDash val="solid"/>
+              <a:round/>
+              <a:headEnd len="sm" w="sm" type="none"/>
+              <a:tailEnd len="sm" w="sm" type="none"/>
+            </a:ln>
+          </p:spPr>
+          <p:txBody>
+            <a:bodyPr anchorCtr="0" anchor="ctr" bIns="91425" lIns="91425" spcFirstLastPara="1" rIns="91425" wrap="square" tIns="91425">
+              <a:noAutofit/>
+            </a:bodyPr>
+            <a:lstStyle/>
+            <a:p>
+              <a:pPr indent="0" lvl="0" marL="0" rtl="0" algn="l">
+                <a:spcBef>
+                  <a:spcPts val="0"/>
+                </a:spcBef>
+                <a:spcAft>
+                  <a:spcPts val="0"/>
+                </a:spcAft>
+                <a:buNone/>
+              </a:pPr>
+              <a:r>
+                <a:rPr lang="en" sz="1800"/>
+                <a:t>  a</a:t>
+              </a:r>
+              <a:r>
+                <a:rPr baseline="-25000" lang="en" sz="1800"/>
+                <a:t>11</a:t>
+              </a:r>
+              <a:endParaRPr baseline="-25000" sz="1800"/>
+            </a:p>
+          </p:txBody>
+        </p:sp>
+      </p:grpSp>
+      <p:grpSp>
+        <p:nvGrpSpPr>
+          <p:cNvPr id="198" name="Google Shape;198;p35"/>
+          <p:cNvGrpSpPr/>
+          <p:nvPr/>
+        </p:nvGrpSpPr>
+        <p:grpSpPr>
+          <a:xfrm>
+            <a:off x="936875" y="3632200"/>
+            <a:ext cx="6888300" cy="475800"/>
+            <a:chOff x="251075" y="1955800"/>
+            <a:chExt cx="6888300" cy="475800"/>
+          </a:xfrm>
+        </p:grpSpPr>
+        <p:sp>
+          <p:nvSpPr>
+            <p:cNvPr id="199" name="Google Shape;199;p35"/>
+            <p:cNvSpPr/>
+            <p:nvPr/>
+          </p:nvSpPr>
+          <p:spPr>
+            <a:xfrm>
+              <a:off x="251075" y="1955800"/>
+              <a:ext cx="568200" cy="475800"/>
+            </a:xfrm>
+            <a:prstGeom prst="rect">
+              <a:avLst/>
+            </a:prstGeom>
+            <a:solidFill>
+              <a:srgbClr val="D9EAD3"/>
+            </a:solidFill>
+            <a:ln cap="flat" cmpd="sng" w="9525">
+              <a:solidFill>
+                <a:schemeClr val="dk2"/>
+              </a:solidFill>
+              <a:prstDash val="solid"/>
+              <a:round/>
+              <a:headEnd len="sm" w="sm" type="none"/>
+              <a:tailEnd len="sm" w="sm" type="none"/>
+            </a:ln>
+          </p:spPr>
+          <p:txBody>
+            <a:bodyPr anchorCtr="0" anchor="ctr" bIns="91425" lIns="91425" spcFirstLastPara="1" rIns="91425" wrap="square" tIns="91425">
+              <a:noAutofit/>
+            </a:bodyPr>
+            <a:lstStyle/>
+            <a:p>
+              <a:pPr indent="0" lvl="0" marL="0" rtl="0" algn="l">
+                <a:spcBef>
+                  <a:spcPts val="0"/>
+                </a:spcBef>
+                <a:spcAft>
+                  <a:spcPts val="0"/>
+                </a:spcAft>
+                <a:buNone/>
+              </a:pPr>
+              <a:r>
+                <a:rPr lang="en" sz="1800"/>
+                <a:t>  a</a:t>
+              </a:r>
+              <a:r>
+                <a:rPr baseline="-25000" lang="en" sz="1800"/>
+                <a:t>0</a:t>
+              </a:r>
+              <a:endParaRPr baseline="-25000" sz="1800"/>
+            </a:p>
+          </p:txBody>
+        </p:sp>
+        <p:sp>
+          <p:nvSpPr>
+            <p:cNvPr id="200" name="Google Shape;200;p35"/>
+            <p:cNvSpPr/>
+            <p:nvPr/>
+          </p:nvSpPr>
+          <p:spPr>
+            <a:xfrm>
+              <a:off x="784475" y="1955800"/>
+              <a:ext cx="568200" cy="475800"/>
+            </a:xfrm>
+            <a:prstGeom prst="rect">
+              <a:avLst/>
+            </a:prstGeom>
+            <a:solidFill>
+              <a:srgbClr val="D9EAD3"/>
+            </a:solidFill>
+            <a:ln cap="flat" cmpd="sng" w="9525">
+              <a:solidFill>
+                <a:schemeClr val="dk2"/>
+              </a:solidFill>
+              <a:prstDash val="solid"/>
+              <a:round/>
+              <a:headEnd len="sm" w="sm" type="none"/>
+              <a:tailEnd len="sm" w="sm" type="none"/>
+            </a:ln>
+          </p:spPr>
+          <p:txBody>
+            <a:bodyPr anchorCtr="0" anchor="ctr" bIns="91425" lIns="91425" spcFirstLastPara="1" rIns="91425" wrap="square" tIns="91425">
+              <a:noAutofit/>
+            </a:bodyPr>
+            <a:lstStyle/>
+            <a:p>
+              <a:pPr indent="0" lvl="0" marL="0" rtl="0" algn="l">
+                <a:spcBef>
+                  <a:spcPts val="0"/>
+                </a:spcBef>
+                <a:spcAft>
+                  <a:spcPts val="0"/>
+                </a:spcAft>
+                <a:buNone/>
+              </a:pPr>
+              <a:r>
+                <a:rPr lang="en" sz="1800"/>
+                <a:t>  a</a:t>
+              </a:r>
+              <a:r>
+                <a:rPr baseline="-25000" lang="en" sz="1800"/>
+                <a:t>4</a:t>
+              </a:r>
+              <a:endParaRPr baseline="-25000" sz="1800"/>
+            </a:p>
+          </p:txBody>
+        </p:sp>
+        <p:sp>
+          <p:nvSpPr>
+            <p:cNvPr id="201" name="Google Shape;201;p35"/>
+            <p:cNvSpPr/>
+            <p:nvPr/>
+          </p:nvSpPr>
+          <p:spPr>
+            <a:xfrm>
+              <a:off x="1317875" y="1955800"/>
+              <a:ext cx="568200" cy="475800"/>
+            </a:xfrm>
+            <a:prstGeom prst="rect">
+              <a:avLst/>
+            </a:prstGeom>
+            <a:solidFill>
+              <a:srgbClr val="D9EAD3"/>
+            </a:solidFill>
+            <a:ln cap="flat" cmpd="sng" w="9525">
+              <a:solidFill>
+                <a:schemeClr val="dk2"/>
+              </a:solidFill>
+              <a:prstDash val="solid"/>
+              <a:round/>
+              <a:headEnd len="sm" w="sm" type="none"/>
+              <a:tailEnd len="sm" w="sm" type="none"/>
+            </a:ln>
+          </p:spPr>
+          <p:txBody>
+            <a:bodyPr anchorCtr="0" anchor="ctr" bIns="91425" lIns="91425" spcFirstLastPara="1" rIns="91425" wrap="square" tIns="91425">
+              <a:noAutofit/>
+            </a:bodyPr>
+            <a:lstStyle/>
+            <a:p>
+              <a:pPr indent="0" lvl="0" marL="0" rtl="0" algn="l">
+                <a:spcBef>
+                  <a:spcPts val="0"/>
+                </a:spcBef>
+                <a:spcAft>
+                  <a:spcPts val="0"/>
+                </a:spcAft>
+                <a:buNone/>
+              </a:pPr>
+              <a:r>
+                <a:rPr lang="en" sz="1800"/>
+                <a:t>  a</a:t>
+              </a:r>
+              <a:r>
+                <a:rPr baseline="-25000" lang="en" sz="1800"/>
+                <a:t>8</a:t>
+              </a:r>
+              <a:endParaRPr baseline="-25000" sz="1800"/>
+            </a:p>
+          </p:txBody>
+        </p:sp>
+        <p:sp>
+          <p:nvSpPr>
+            <p:cNvPr id="202" name="Google Shape;202;p35"/>
+            <p:cNvSpPr/>
+            <p:nvPr/>
+          </p:nvSpPr>
+          <p:spPr>
+            <a:xfrm>
+              <a:off x="1927475" y="1955800"/>
+              <a:ext cx="568200" cy="475800"/>
+            </a:xfrm>
+            <a:prstGeom prst="rect">
+              <a:avLst/>
+            </a:prstGeom>
+            <a:solidFill>
+              <a:srgbClr val="D9EAD3"/>
+            </a:solidFill>
+            <a:ln cap="flat" cmpd="sng" w="9525">
+              <a:solidFill>
+                <a:schemeClr val="dk2"/>
+              </a:solidFill>
+              <a:prstDash val="solid"/>
+              <a:round/>
+              <a:headEnd len="sm" w="sm" type="none"/>
+              <a:tailEnd len="sm" w="sm" type="none"/>
+            </a:ln>
+          </p:spPr>
+          <p:txBody>
+            <a:bodyPr anchorCtr="0" anchor="ctr" bIns="91425" lIns="91425" spcFirstLastPara="1" rIns="91425" wrap="square" tIns="91425">
+              <a:noAutofit/>
+            </a:bodyPr>
+            <a:lstStyle/>
+            <a:p>
+              <a:pPr indent="0" lvl="0" marL="0" rtl="0" algn="l">
+                <a:spcBef>
+                  <a:spcPts val="0"/>
+                </a:spcBef>
+                <a:spcAft>
+                  <a:spcPts val="0"/>
+                </a:spcAft>
+                <a:buNone/>
+              </a:pPr>
+              <a:r>
+                <a:rPr lang="en" sz="1800"/>
+                <a:t>  a</a:t>
+              </a:r>
+              <a:r>
+                <a:rPr baseline="-25000" lang="en" sz="1800"/>
+                <a:t>1</a:t>
+              </a:r>
+              <a:endParaRPr baseline="-25000" sz="1800"/>
+            </a:p>
+          </p:txBody>
+        </p:sp>
+        <p:sp>
+          <p:nvSpPr>
+            <p:cNvPr id="203" name="Google Shape;203;p35"/>
+            <p:cNvSpPr/>
+            <p:nvPr/>
+          </p:nvSpPr>
+          <p:spPr>
+            <a:xfrm>
+              <a:off x="2460875" y="1955800"/>
+              <a:ext cx="568200" cy="475800"/>
+            </a:xfrm>
+            <a:prstGeom prst="rect">
+              <a:avLst/>
+            </a:prstGeom>
+            <a:solidFill>
+              <a:srgbClr val="D9EAD3"/>
+            </a:solidFill>
+            <a:ln cap="flat" cmpd="sng" w="9525">
+              <a:solidFill>
+                <a:schemeClr val="dk2"/>
+              </a:solidFill>
+              <a:prstDash val="solid"/>
+              <a:round/>
+              <a:headEnd len="sm" w="sm" type="none"/>
+              <a:tailEnd len="sm" w="sm" type="none"/>
+            </a:ln>
+          </p:spPr>
+          <p:txBody>
+            <a:bodyPr anchorCtr="0" anchor="ctr" bIns="91425" lIns="91425" spcFirstLastPara="1" rIns="91425" wrap="square" tIns="91425">
+              <a:noAutofit/>
+            </a:bodyPr>
+            <a:lstStyle/>
+            <a:p>
+              <a:pPr indent="0" lvl="0" marL="0" rtl="0" algn="l">
+                <a:spcBef>
+                  <a:spcPts val="0"/>
+                </a:spcBef>
+                <a:spcAft>
+                  <a:spcPts val="0"/>
+                </a:spcAft>
+                <a:buNone/>
+              </a:pPr>
+              <a:r>
+                <a:rPr lang="en" sz="1800"/>
+                <a:t>  a</a:t>
+              </a:r>
+              <a:r>
+                <a:rPr baseline="-25000" lang="en" sz="1800"/>
+                <a:t>5</a:t>
+              </a:r>
+              <a:endParaRPr baseline="-25000" sz="1800"/>
+            </a:p>
+          </p:txBody>
+        </p:sp>
+        <p:sp>
+          <p:nvSpPr>
+            <p:cNvPr id="204" name="Google Shape;204;p35"/>
+            <p:cNvSpPr/>
+            <p:nvPr/>
+          </p:nvSpPr>
+          <p:spPr>
+            <a:xfrm>
+              <a:off x="2994275" y="1955800"/>
+              <a:ext cx="568200" cy="475800"/>
+            </a:xfrm>
+            <a:prstGeom prst="rect">
+              <a:avLst/>
+            </a:prstGeom>
+            <a:solidFill>
+              <a:srgbClr val="D9EAD3"/>
+            </a:solidFill>
+            <a:ln cap="flat" cmpd="sng" w="9525">
+              <a:solidFill>
+                <a:schemeClr val="dk2"/>
+              </a:solidFill>
+              <a:prstDash val="solid"/>
+              <a:round/>
+              <a:headEnd len="sm" w="sm" type="none"/>
+              <a:tailEnd len="sm" w="sm" type="none"/>
+            </a:ln>
+          </p:spPr>
+          <p:txBody>
+            <a:bodyPr anchorCtr="0" anchor="ctr" bIns="91425" lIns="91425" spcFirstLastPara="1" rIns="91425" wrap="square" tIns="91425">
+              <a:noAutofit/>
+            </a:bodyPr>
+            <a:lstStyle/>
+            <a:p>
+              <a:pPr indent="0" lvl="0" marL="0" rtl="0" algn="l">
+                <a:spcBef>
+                  <a:spcPts val="0"/>
+                </a:spcBef>
+                <a:spcAft>
+                  <a:spcPts val="0"/>
+                </a:spcAft>
+                <a:buNone/>
+              </a:pPr>
+              <a:r>
+                <a:rPr lang="en" sz="1800"/>
+                <a:t>  a</a:t>
+              </a:r>
+              <a:r>
+                <a:rPr baseline="-25000" lang="en" sz="1800"/>
+                <a:t>9</a:t>
+              </a:r>
+              <a:endParaRPr baseline="-25000" sz="1800"/>
+            </a:p>
+          </p:txBody>
+        </p:sp>
+        <p:sp>
+          <p:nvSpPr>
+            <p:cNvPr id="205" name="Google Shape;205;p35"/>
+            <p:cNvSpPr/>
+            <p:nvPr/>
+          </p:nvSpPr>
+          <p:spPr>
+            <a:xfrm>
+              <a:off x="3603875" y="1955800"/>
+              <a:ext cx="568200" cy="475800"/>
+            </a:xfrm>
+            <a:prstGeom prst="rect">
+              <a:avLst/>
+            </a:prstGeom>
+            <a:solidFill>
+              <a:srgbClr val="D9EAD3"/>
+            </a:solidFill>
+            <a:ln cap="flat" cmpd="sng" w="9525">
+              <a:solidFill>
+                <a:schemeClr val="dk2"/>
+              </a:solidFill>
+              <a:prstDash val="solid"/>
+              <a:round/>
+              <a:headEnd len="sm" w="sm" type="none"/>
+              <a:tailEnd len="sm" w="sm" type="none"/>
+            </a:ln>
+          </p:spPr>
+          <p:txBody>
+            <a:bodyPr anchorCtr="0" anchor="ctr" bIns="91425" lIns="91425" spcFirstLastPara="1" rIns="91425" wrap="square" tIns="91425">
+              <a:noAutofit/>
+            </a:bodyPr>
+            <a:lstStyle/>
+            <a:p>
+              <a:pPr indent="0" lvl="0" marL="0" rtl="0" algn="l">
+                <a:spcBef>
+                  <a:spcPts val="0"/>
+                </a:spcBef>
+                <a:spcAft>
+                  <a:spcPts val="0"/>
+                </a:spcAft>
+                <a:buNone/>
+              </a:pPr>
+              <a:r>
+                <a:rPr lang="en" sz="1800"/>
+                <a:t>  a</a:t>
+              </a:r>
+              <a:r>
+                <a:rPr baseline="-25000" lang="en" sz="1800"/>
+                <a:t>2</a:t>
+              </a:r>
+              <a:endParaRPr baseline="-25000" sz="1800"/>
+            </a:p>
+          </p:txBody>
+        </p:sp>
+        <p:sp>
+          <p:nvSpPr>
+            <p:cNvPr id="206" name="Google Shape;206;p35"/>
+            <p:cNvSpPr/>
+            <p:nvPr/>
+          </p:nvSpPr>
+          <p:spPr>
+            <a:xfrm>
+              <a:off x="4137275" y="1955800"/>
+              <a:ext cx="568200" cy="475800"/>
+            </a:xfrm>
+            <a:prstGeom prst="rect">
+              <a:avLst/>
+            </a:prstGeom>
+            <a:solidFill>
+              <a:srgbClr val="D9EAD3"/>
+            </a:solidFill>
+            <a:ln cap="flat" cmpd="sng" w="9525">
+              <a:solidFill>
+                <a:schemeClr val="dk2"/>
+              </a:solidFill>
+              <a:prstDash val="solid"/>
+              <a:round/>
+              <a:headEnd len="sm" w="sm" type="none"/>
+              <a:tailEnd len="sm" w="sm" type="none"/>
+            </a:ln>
+          </p:spPr>
+          <p:txBody>
+            <a:bodyPr anchorCtr="0" anchor="ctr" bIns="91425" lIns="91425" spcFirstLastPara="1" rIns="91425" wrap="square" tIns="91425">
+              <a:noAutofit/>
+            </a:bodyPr>
+            <a:lstStyle/>
+            <a:p>
+              <a:pPr indent="0" lvl="0" marL="0" rtl="0" algn="l">
+                <a:spcBef>
+                  <a:spcPts val="0"/>
+                </a:spcBef>
+                <a:spcAft>
+                  <a:spcPts val="0"/>
+                </a:spcAft>
+                <a:buNone/>
+              </a:pPr>
+              <a:r>
+                <a:rPr lang="en" sz="1800"/>
+                <a:t>  a</a:t>
+              </a:r>
+              <a:r>
+                <a:rPr baseline="-25000" lang="en" sz="1800"/>
+                <a:t>6</a:t>
+              </a:r>
+              <a:endParaRPr baseline="-25000" sz="1800"/>
+            </a:p>
+          </p:txBody>
+        </p:sp>
+        <p:sp>
+          <p:nvSpPr>
+            <p:cNvPr id="207" name="Google Shape;207;p35"/>
+            <p:cNvSpPr/>
+            <p:nvPr/>
+          </p:nvSpPr>
+          <p:spPr>
+            <a:xfrm>
+              <a:off x="4670675" y="1955800"/>
+              <a:ext cx="639900" cy="475800"/>
+            </a:xfrm>
+            <a:prstGeom prst="rect">
+              <a:avLst/>
+            </a:prstGeom>
+            <a:solidFill>
+              <a:srgbClr val="D9EAD3"/>
+            </a:solidFill>
+            <a:ln cap="flat" cmpd="sng" w="9525">
+              <a:solidFill>
+                <a:schemeClr val="dk2"/>
+              </a:solidFill>
+              <a:prstDash val="solid"/>
+              <a:round/>
+              <a:headEnd len="sm" w="sm" type="none"/>
+              <a:tailEnd len="sm" w="sm" type="none"/>
+            </a:ln>
+          </p:spPr>
+          <p:txBody>
+            <a:bodyPr anchorCtr="0" anchor="ctr" bIns="91425" lIns="91425" spcFirstLastPara="1" rIns="91425" wrap="square" tIns="91425">
+              <a:noAutofit/>
+            </a:bodyPr>
+            <a:lstStyle/>
+            <a:p>
+              <a:pPr indent="0" lvl="0" marL="0" rtl="0" algn="l">
+                <a:spcBef>
+                  <a:spcPts val="0"/>
+                </a:spcBef>
+                <a:spcAft>
+                  <a:spcPts val="0"/>
+                </a:spcAft>
+                <a:buNone/>
+              </a:pPr>
+              <a:r>
+                <a:rPr lang="en" sz="1800"/>
+                <a:t>  a</a:t>
+              </a:r>
+              <a:r>
+                <a:rPr baseline="-25000" lang="en" sz="1800"/>
+                <a:t>10</a:t>
+              </a:r>
+              <a:endParaRPr baseline="-25000" sz="1800"/>
+            </a:p>
+          </p:txBody>
+        </p:sp>
+        <p:sp>
+          <p:nvSpPr>
+            <p:cNvPr id="208" name="Google Shape;208;p35"/>
+            <p:cNvSpPr/>
+            <p:nvPr/>
+          </p:nvSpPr>
+          <p:spPr>
+            <a:xfrm>
+              <a:off x="5356475" y="1955800"/>
+              <a:ext cx="568200" cy="475800"/>
+            </a:xfrm>
+            <a:prstGeom prst="rect">
+              <a:avLst/>
+            </a:prstGeom>
+            <a:solidFill>
+              <a:srgbClr val="D9EAD3"/>
+            </a:solidFill>
+            <a:ln cap="flat" cmpd="sng" w="9525">
+              <a:solidFill>
+                <a:schemeClr val="dk2"/>
+              </a:solidFill>
+              <a:prstDash val="solid"/>
+              <a:round/>
+              <a:headEnd len="sm" w="sm" type="none"/>
+              <a:tailEnd len="sm" w="sm" type="none"/>
+            </a:ln>
+          </p:spPr>
+          <p:txBody>
+            <a:bodyPr anchorCtr="0" anchor="ctr" bIns="91425" lIns="91425" spcFirstLastPara="1" rIns="91425" wrap="square" tIns="91425">
+              <a:noAutofit/>
+            </a:bodyPr>
+            <a:lstStyle/>
+            <a:p>
+              <a:pPr indent="0" lvl="0" marL="0" rtl="0" algn="l">
+                <a:spcBef>
+                  <a:spcPts val="0"/>
+                </a:spcBef>
+                <a:spcAft>
+                  <a:spcPts val="0"/>
+                </a:spcAft>
+                <a:buNone/>
+              </a:pPr>
+              <a:r>
+                <a:rPr lang="en" sz="1800"/>
+                <a:t>  a</a:t>
+              </a:r>
+              <a:r>
+                <a:rPr baseline="-25000" lang="en" sz="1800"/>
+                <a:t>3</a:t>
+              </a:r>
+              <a:endParaRPr baseline="-25000" sz="1800"/>
+            </a:p>
+          </p:txBody>
+        </p:sp>
+        <p:sp>
+          <p:nvSpPr>
+            <p:cNvPr id="209" name="Google Shape;209;p35"/>
+            <p:cNvSpPr/>
+            <p:nvPr/>
+          </p:nvSpPr>
+          <p:spPr>
+            <a:xfrm>
+              <a:off x="5889875" y="1955800"/>
+              <a:ext cx="639900" cy="475800"/>
+            </a:xfrm>
+            <a:prstGeom prst="rect">
+              <a:avLst/>
+            </a:prstGeom>
+            <a:solidFill>
+              <a:srgbClr val="D9EAD3"/>
+            </a:solidFill>
+            <a:ln cap="flat" cmpd="sng" w="9525">
+              <a:solidFill>
+                <a:schemeClr val="dk2"/>
+              </a:solidFill>
+              <a:prstDash val="solid"/>
+              <a:round/>
+              <a:headEnd len="sm" w="sm" type="none"/>
+              <a:tailEnd len="sm" w="sm" type="none"/>
+            </a:ln>
+          </p:spPr>
+          <p:txBody>
+            <a:bodyPr anchorCtr="0" anchor="ctr" bIns="91425" lIns="91425" spcFirstLastPara="1" rIns="91425" wrap="square" tIns="91425">
+              <a:noAutofit/>
+            </a:bodyPr>
+            <a:lstStyle/>
+            <a:p>
+              <a:pPr indent="0" lvl="0" marL="0" rtl="0" algn="l">
+                <a:spcBef>
+                  <a:spcPts val="0"/>
+                </a:spcBef>
+                <a:spcAft>
+                  <a:spcPts val="0"/>
+                </a:spcAft>
+                <a:buNone/>
+              </a:pPr>
+              <a:r>
+                <a:rPr lang="en" sz="1800"/>
+                <a:t>  a</a:t>
+              </a:r>
+              <a:r>
+                <a:rPr baseline="-25000" lang="en" sz="1800"/>
+                <a:t>7</a:t>
+              </a:r>
+              <a:endParaRPr baseline="-25000" sz="1800"/>
+            </a:p>
+          </p:txBody>
+        </p:sp>
+        <p:sp>
+          <p:nvSpPr>
+            <p:cNvPr id="210" name="Google Shape;210;p35"/>
+            <p:cNvSpPr/>
+            <p:nvPr/>
+          </p:nvSpPr>
+          <p:spPr>
+            <a:xfrm>
+              <a:off x="6499475" y="1955800"/>
+              <a:ext cx="639900" cy="475800"/>
+            </a:xfrm>
+            <a:prstGeom prst="rect">
+              <a:avLst/>
+            </a:prstGeom>
+            <a:solidFill>
+              <a:srgbClr val="D9EAD3"/>
+            </a:solidFill>
+            <a:ln cap="flat" cmpd="sng" w="9525">
+              <a:solidFill>
+                <a:schemeClr val="dk2"/>
+              </a:solidFill>
+              <a:prstDash val="solid"/>
+              <a:round/>
+              <a:headEnd len="sm" w="sm" type="none"/>
+              <a:tailEnd len="sm" w="sm" type="none"/>
+            </a:ln>
+          </p:spPr>
+          <p:txBody>
+            <a:bodyPr anchorCtr="0" anchor="ctr" bIns="91425" lIns="91425" spcFirstLastPara="1" rIns="91425" wrap="square" tIns="91425">
+              <a:noAutofit/>
+            </a:bodyPr>
+            <a:lstStyle/>
+            <a:p>
+              <a:pPr indent="0" lvl="0" marL="0" rtl="0" algn="l">
+                <a:spcBef>
+                  <a:spcPts val="0"/>
+                </a:spcBef>
+                <a:spcAft>
+                  <a:spcPts val="0"/>
+                </a:spcAft>
+                <a:buNone/>
+              </a:pPr>
+              <a:r>
+                <a:rPr lang="en" sz="1800"/>
+                <a:t>  a</a:t>
+              </a:r>
+              <a:r>
+                <a:rPr baseline="-25000" lang="en" sz="1800"/>
+                <a:t>11</a:t>
+              </a:r>
+              <a:endParaRPr baseline="-25000" sz="1800"/>
+            </a:p>
+          </p:txBody>
+        </p:sp>
+      </p:grpSp>
+      <p:cxnSp>
+        <p:nvCxnSpPr>
+          <p:cNvPr id="211" name="Google Shape;211;p35"/>
+          <p:cNvCxnSpPr>
+            <a:stCxn id="185" idx="2"/>
+            <a:endCxn id="199" idx="0"/>
+          </p:cNvCxnSpPr>
+          <p:nvPr/>
+        </p:nvCxnSpPr>
+        <p:spPr>
+          <a:xfrm>
+            <a:off x="1220975" y="2965000"/>
+            <a:ext cx="0" cy="667200"/>
+          </a:xfrm>
+          <a:prstGeom prst="straightConnector1">
+            <a:avLst/>
+          </a:prstGeom>
+          <a:noFill/>
+          <a:ln cap="flat" cmpd="sng" w="9525">
+            <a:solidFill>
+              <a:schemeClr val="dk2"/>
+            </a:solidFill>
+            <a:prstDash val="solid"/>
+            <a:round/>
+            <a:headEnd len="med" w="med" type="none"/>
+            <a:tailEnd len="med" w="med" type="triangle"/>
+          </a:ln>
+        </p:spPr>
+      </p:cxnSp>
+      <p:cxnSp>
+        <p:nvCxnSpPr>
+          <p:cNvPr id="212" name="Google Shape;212;p35"/>
+          <p:cNvCxnSpPr>
+            <a:endCxn id="202" idx="0"/>
+          </p:cNvCxnSpPr>
+          <p:nvPr/>
+        </p:nvCxnSpPr>
+        <p:spPr>
+          <a:xfrm>
+            <a:off x="1678175" y="2965000"/>
+            <a:ext cx="1219200" cy="667200"/>
+          </a:xfrm>
+          <a:prstGeom prst="straightConnector1">
+            <a:avLst/>
+          </a:prstGeom>
+          <a:noFill/>
+          <a:ln cap="flat" cmpd="sng" w="9525">
+            <a:solidFill>
+              <a:schemeClr val="dk2"/>
+            </a:solidFill>
+            <a:prstDash val="solid"/>
+            <a:round/>
+            <a:headEnd len="med" w="med" type="none"/>
+            <a:tailEnd len="med" w="med" type="triangle"/>
+          </a:ln>
+        </p:spPr>
+      </p:cxnSp>
+      <p:cxnSp>
+        <p:nvCxnSpPr>
+          <p:cNvPr id="213" name="Google Shape;213;p35"/>
+          <p:cNvCxnSpPr>
+            <a:stCxn id="187" idx="2"/>
+            <a:endCxn id="205" idx="0"/>
+          </p:cNvCxnSpPr>
+          <p:nvPr/>
+        </p:nvCxnSpPr>
+        <p:spPr>
+          <a:xfrm>
+            <a:off x="2287775" y="2965000"/>
+            <a:ext cx="2286000" cy="667200"/>
+          </a:xfrm>
+          <a:prstGeom prst="straightConnector1">
+            <a:avLst/>
+          </a:prstGeom>
+          <a:noFill/>
+          <a:ln cap="flat" cmpd="sng" w="9525">
+            <a:solidFill>
+              <a:schemeClr val="dk2"/>
+            </a:solidFill>
+            <a:prstDash val="solid"/>
+            <a:round/>
+            <a:headEnd len="med" w="med" type="none"/>
+            <a:tailEnd len="med" w="med" type="triangle"/>
+          </a:ln>
+        </p:spPr>
+      </p:cxnSp>
+      <p:cxnSp>
+        <p:nvCxnSpPr>
+          <p:cNvPr id="214" name="Google Shape;214;p35"/>
+          <p:cNvCxnSpPr>
+            <a:endCxn id="208" idx="0"/>
+          </p:cNvCxnSpPr>
+          <p:nvPr/>
+        </p:nvCxnSpPr>
+        <p:spPr>
+          <a:xfrm>
+            <a:off x="2821175" y="2965000"/>
+            <a:ext cx="3505200" cy="667200"/>
+          </a:xfrm>
+          <a:prstGeom prst="straightConnector1">
+            <a:avLst/>
+          </a:prstGeom>
+          <a:noFill/>
+          <a:ln cap="flat" cmpd="sng" w="9525">
+            <a:solidFill>
+              <a:schemeClr val="dk2"/>
+            </a:solidFill>
+            <a:prstDash val="solid"/>
+            <a:round/>
+            <a:headEnd len="med" w="med" type="none"/>
+            <a:tailEnd len="med" w="med" type="triangle"/>
+          </a:ln>
+        </p:spPr>
+      </p:cxnSp>
+      <p:cxnSp>
+        <p:nvCxnSpPr>
+          <p:cNvPr id="215" name="Google Shape;215;p35"/>
+          <p:cNvCxnSpPr>
+            <a:stCxn id="190" idx="2"/>
+            <a:endCxn id="200" idx="0"/>
+          </p:cNvCxnSpPr>
+          <p:nvPr/>
+        </p:nvCxnSpPr>
+        <p:spPr>
+          <a:xfrm flipH="1">
+            <a:off x="1754375" y="2965000"/>
+            <a:ext cx="1676400" cy="667200"/>
+          </a:xfrm>
+          <a:prstGeom prst="straightConnector1">
+            <a:avLst/>
+          </a:prstGeom>
+          <a:noFill/>
+          <a:ln cap="flat" cmpd="sng" w="9525">
+            <a:solidFill>
+              <a:schemeClr val="dk2"/>
+            </a:solidFill>
+            <a:prstDash val="solid"/>
+            <a:round/>
+            <a:headEnd len="med" w="med" type="none"/>
+            <a:tailEnd len="med" w="med" type="triangle"/>
+          </a:ln>
+        </p:spPr>
+      </p:cxnSp>
+      <p:cxnSp>
+        <p:nvCxnSpPr>
+          <p:cNvPr id="216" name="Google Shape;216;p35"/>
+          <p:cNvCxnSpPr>
+            <a:stCxn id="191" idx="2"/>
+            <a:endCxn id="203" idx="0"/>
+          </p:cNvCxnSpPr>
+          <p:nvPr/>
+        </p:nvCxnSpPr>
+        <p:spPr>
+          <a:xfrm flipH="1">
+            <a:off x="3430775" y="2965000"/>
+            <a:ext cx="533400" cy="667200"/>
+          </a:xfrm>
+          <a:prstGeom prst="straightConnector1">
+            <a:avLst/>
+          </a:prstGeom>
+          <a:noFill/>
+          <a:ln cap="flat" cmpd="sng" w="9525">
+            <a:solidFill>
+              <a:schemeClr val="dk2"/>
+            </a:solidFill>
+            <a:prstDash val="solid"/>
+            <a:round/>
+            <a:headEnd len="med" w="med" type="none"/>
+            <a:tailEnd len="med" w="med" type="triangle"/>
+          </a:ln>
+        </p:spPr>
+      </p:cxnSp>
+      <p:cxnSp>
+        <p:nvCxnSpPr>
+          <p:cNvPr id="217" name="Google Shape;217;p35"/>
+          <p:cNvCxnSpPr>
+            <a:stCxn id="196" idx="2"/>
+            <a:endCxn id="207" idx="0"/>
+          </p:cNvCxnSpPr>
+          <p:nvPr/>
+        </p:nvCxnSpPr>
+        <p:spPr>
+          <a:xfrm flipH="1">
+            <a:off x="5676425" y="2965000"/>
+            <a:ext cx="1066800" cy="667200"/>
+          </a:xfrm>
+          <a:prstGeom prst="straightConnector1">
+            <a:avLst/>
+          </a:prstGeom>
+          <a:noFill/>
+          <a:ln cap="flat" cmpd="sng" w="9525">
+            <a:solidFill>
+              <a:schemeClr val="dk2"/>
+            </a:solidFill>
+            <a:prstDash val="solid"/>
+            <a:round/>
+            <a:headEnd len="med" w="med" type="none"/>
+            <a:tailEnd len="med" w="med" type="triangle"/>
+          </a:ln>
+        </p:spPr>
+      </p:cxnSp>
+      <p:cxnSp>
+        <p:nvCxnSpPr>
+          <p:cNvPr id="218" name="Google Shape;218;p35"/>
+          <p:cNvCxnSpPr>
+            <a:stCxn id="197" idx="2"/>
+            <a:endCxn id="210" idx="0"/>
+          </p:cNvCxnSpPr>
+          <p:nvPr/>
+        </p:nvCxnSpPr>
+        <p:spPr>
+          <a:xfrm>
+            <a:off x="7352825" y="2965000"/>
+            <a:ext cx="152400" cy="667200"/>
+          </a:xfrm>
+          <a:prstGeom prst="straightConnector1">
+            <a:avLst/>
+          </a:prstGeom>
+          <a:noFill/>
+          <a:ln cap="flat" cmpd="sng" w="9525">
+            <a:solidFill>
+              <a:schemeClr val="dk2"/>
+            </a:solidFill>
+            <a:prstDash val="solid"/>
+            <a:round/>
+            <a:headEnd len="med" w="med" type="none"/>
+            <a:tailEnd len="med" w="med" type="triangle"/>
+          </a:ln>
+        </p:spPr>
+      </p:cxnSp>
+      <p:cxnSp>
+        <p:nvCxnSpPr>
+          <p:cNvPr id="219" name="Google Shape;219;p35"/>
+          <p:cNvCxnSpPr>
+            <a:stCxn id="192" idx="2"/>
+            <a:endCxn id="206" idx="0"/>
+          </p:cNvCxnSpPr>
+          <p:nvPr/>
+        </p:nvCxnSpPr>
+        <p:spPr>
+          <a:xfrm>
+            <a:off x="4497575" y="2965000"/>
+            <a:ext cx="609600" cy="667200"/>
+          </a:xfrm>
+          <a:prstGeom prst="straightConnector1">
+            <a:avLst/>
+          </a:prstGeom>
+          <a:noFill/>
+          <a:ln cap="flat" cmpd="sng" w="9525">
+            <a:solidFill>
+              <a:schemeClr val="dk2"/>
+            </a:solidFill>
+            <a:prstDash val="solid"/>
+            <a:round/>
+            <a:headEnd len="med" w="med" type="none"/>
+            <a:tailEnd len="med" w="med" type="triangle"/>
+          </a:ln>
+        </p:spPr>
+      </p:cxnSp>
+      <p:cxnSp>
+        <p:nvCxnSpPr>
+          <p:cNvPr id="220" name="Google Shape;220;p35"/>
+          <p:cNvCxnSpPr>
+            <a:stCxn id="193" idx="2"/>
+            <a:endCxn id="209" idx="0"/>
+          </p:cNvCxnSpPr>
+          <p:nvPr/>
+        </p:nvCxnSpPr>
+        <p:spPr>
+          <a:xfrm>
+            <a:off x="5030975" y="2965000"/>
+            <a:ext cx="1864800" cy="667200"/>
+          </a:xfrm>
+          <a:prstGeom prst="straightConnector1">
+            <a:avLst/>
+          </a:prstGeom>
+          <a:noFill/>
+          <a:ln cap="flat" cmpd="sng" w="9525">
+            <a:solidFill>
+              <a:schemeClr val="dk2"/>
+            </a:solidFill>
+            <a:prstDash val="solid"/>
+            <a:round/>
+            <a:headEnd len="med" w="med" type="none"/>
+            <a:tailEnd len="med" w="med" type="triangle"/>
+          </a:ln>
+        </p:spPr>
+      </p:cxnSp>
+      <p:cxnSp>
+        <p:nvCxnSpPr>
+          <p:cNvPr id="221" name="Google Shape;221;p35"/>
+          <p:cNvCxnSpPr>
+            <a:stCxn id="194" idx="2"/>
+            <a:endCxn id="201" idx="0"/>
+          </p:cNvCxnSpPr>
+          <p:nvPr/>
+        </p:nvCxnSpPr>
+        <p:spPr>
+          <a:xfrm flipH="1">
+            <a:off x="2287775" y="2965000"/>
+            <a:ext cx="3352800" cy="667200"/>
+          </a:xfrm>
+          <a:prstGeom prst="straightConnector1">
+            <a:avLst/>
+          </a:prstGeom>
+          <a:noFill/>
+          <a:ln cap="flat" cmpd="sng" w="9525">
+            <a:solidFill>
+              <a:schemeClr val="dk2"/>
+            </a:solidFill>
+            <a:prstDash val="solid"/>
+            <a:round/>
+            <a:headEnd len="med" w="med" type="none"/>
+            <a:tailEnd len="med" w="med" type="triangle"/>
+          </a:ln>
+        </p:spPr>
+      </p:cxnSp>
+      <p:cxnSp>
+        <p:nvCxnSpPr>
+          <p:cNvPr id="222" name="Google Shape;222;p35"/>
+          <p:cNvCxnSpPr>
+            <a:stCxn id="195" idx="2"/>
+            <a:endCxn id="204" idx="0"/>
+          </p:cNvCxnSpPr>
+          <p:nvPr/>
+        </p:nvCxnSpPr>
+        <p:spPr>
+          <a:xfrm flipH="1">
+            <a:off x="3964175" y="2965000"/>
+            <a:ext cx="2209800" cy="667200"/>
+          </a:xfrm>
+          <a:prstGeom prst="straightConnector1">
+            <a:avLst/>
+          </a:prstGeom>
+          <a:noFill/>
+          <a:ln cap="flat" cmpd="sng" w="9525">
+            <a:solidFill>
+              <a:schemeClr val="dk2"/>
+            </a:solidFill>
+            <a:prstDash val="solid"/>
+            <a:round/>
+            <a:headEnd len="med" w="med" type="none"/>
+            <a:tailEnd len="med" w="med" type="triangle"/>
+          </a:ln>
+        </p:spPr>
+      </p:cxnSp>
+      <p:sp>
+        <p:nvSpPr>
+          <p:cNvPr id="223" name="Google Shape;223;p35"/>
+          <p:cNvSpPr txBox="1"/>
+          <p:nvPr/>
+        </p:nvSpPr>
+        <p:spPr>
+          <a:xfrm>
+            <a:off x="366900" y="2503725"/>
+            <a:ext cx="297900" cy="523200"/>
+          </a:xfrm>
+          <a:prstGeom prst="rect">
+            <a:avLst/>
+          </a:prstGeom>
+          <a:noFill/>
+          <a:ln>
+            <a:noFill/>
+          </a:ln>
+        </p:spPr>
+        <p:txBody>
+          <a:bodyPr anchorCtr="0" anchor="t" bIns="91425" lIns="91425" spcFirstLastPara="1" rIns="91425" wrap="square" tIns="91425">
+            <a:spAutoFit/>
+          </a:bodyPr>
+          <a:lstStyle/>
+          <a:p>
+            <a:pPr indent="0" lvl="0" marL="0" rtl="0" algn="l">
+              <a:spcBef>
+                <a:spcPts val="0"/>
+              </a:spcBef>
+              <a:spcAft>
+                <a:spcPts val="0"/>
+              </a:spcAft>
+              <a:buNone/>
+            </a:pPr>
+            <a:r>
+              <a:rPr b="1" lang="en" sz="2200"/>
+              <a:t>a</a:t>
+            </a:r>
+            <a:endParaRPr b="1" sz="2200"/>
+          </a:p>
+        </p:txBody>
+      </p:sp>
+      <p:sp>
+        <p:nvSpPr>
+          <p:cNvPr id="224" name="Google Shape;224;p35"/>
+          <p:cNvSpPr txBox="1"/>
+          <p:nvPr/>
+        </p:nvSpPr>
+        <p:spPr>
+          <a:xfrm>
+            <a:off x="366900" y="3646725"/>
+            <a:ext cx="297900" cy="523200"/>
+          </a:xfrm>
+          <a:prstGeom prst="rect">
+            <a:avLst/>
+          </a:prstGeom>
+          <a:noFill/>
+          <a:ln>
+            <a:noFill/>
+          </a:ln>
+        </p:spPr>
+        <p:txBody>
+          <a:bodyPr anchorCtr="0" anchor="t" bIns="91425" lIns="91425" spcFirstLastPara="1" rIns="91425" wrap="square" tIns="91425">
+            <a:spAutoFit/>
+          </a:bodyPr>
+          <a:lstStyle/>
+          <a:p>
+            <a:pPr indent="0" lvl="0" marL="0" rtl="0" algn="l">
+              <a:spcBef>
+                <a:spcPts val="0"/>
+              </a:spcBef>
+              <a:spcAft>
+                <a:spcPts val="0"/>
+              </a:spcAft>
+              <a:buNone/>
+            </a:pPr>
+            <a:r>
+              <a:rPr b="1" lang="en" sz="2200"/>
+              <a:t>b</a:t>
+            </a:r>
+            <a:endParaRPr b="1" sz="2200"/>
+          </a:p>
+        </p:txBody>
+      </p:sp>
+      <p:sp>
+        <p:nvSpPr>
+          <p:cNvPr id="225" name="Google Shape;225;p35"/>
+          <p:cNvSpPr txBox="1"/>
+          <p:nvPr/>
+        </p:nvSpPr>
+        <p:spPr>
+          <a:xfrm>
+            <a:off x="330350" y="1159000"/>
+            <a:ext cx="8232300" cy="800400"/>
+          </a:xfrm>
+          <a:prstGeom prst="rect">
+            <a:avLst/>
+          </a:prstGeom>
+          <a:noFill/>
+          <a:ln>
+            <a:noFill/>
+          </a:ln>
+        </p:spPr>
+        <p:txBody>
+          <a:bodyPr anchorCtr="0" anchor="t" bIns="91425" lIns="91425" spcFirstLastPara="1" rIns="91425" wrap="square" tIns="91425">
+            <a:spAutoFit/>
+          </a:bodyPr>
+          <a:lstStyle/>
+          <a:p>
+            <a:pPr indent="0" lvl="0" marL="0" rtl="0" algn="l">
+              <a:spcBef>
+                <a:spcPts val="0"/>
+              </a:spcBef>
+              <a:spcAft>
+                <a:spcPts val="0"/>
+              </a:spcAft>
+              <a:buNone/>
+            </a:pPr>
+            <a:r>
+              <a:rPr b="1" lang="en" sz="2000"/>
+              <a:t>Провести копирование массива </a:t>
+            </a:r>
+            <a:r>
+              <a:rPr b="1" i="1" lang="en" sz="2000"/>
+              <a:t>a</a:t>
+            </a:r>
+            <a:r>
+              <a:rPr b="1" lang="en" sz="2000"/>
+              <a:t>, включающего </a:t>
+            </a:r>
+            <a:r>
+              <a:rPr b="1" i="1" lang="en" sz="2000"/>
+              <a:t>N </a:t>
+            </a:r>
+            <a:r>
+              <a:rPr b="1" lang="en" sz="2000"/>
+              <a:t>векторов длины </a:t>
+            </a:r>
+            <a:r>
+              <a:rPr b="1" i="1" lang="en" sz="2000"/>
+              <a:t>K</a:t>
+            </a:r>
+            <a:r>
+              <a:rPr b="1" lang="en" sz="2000"/>
+              <a:t> по образцу, приведенному на диаграмме:</a:t>
+            </a:r>
+            <a:endParaRPr b="1" sz="2000"/>
+          </a:p>
+        </p:txBody>
+      </p:sp>
+      <p:sp>
+        <p:nvSpPr>
+          <p:cNvPr id="226" name="Google Shape;226;p35"/>
+          <p:cNvSpPr txBox="1"/>
+          <p:nvPr/>
+        </p:nvSpPr>
+        <p:spPr>
+          <a:xfrm>
+            <a:off x="332825" y="274325"/>
+            <a:ext cx="2360100" cy="354900"/>
+          </a:xfrm>
+          <a:prstGeom prst="rect">
+            <a:avLst/>
+          </a:prstGeom>
+          <a:noFill/>
+          <a:ln>
+            <a:noFill/>
+          </a:ln>
+        </p:spPr>
+        <p:txBody>
+          <a:bodyPr anchorCtr="0" anchor="t" bIns="91425" lIns="91425" spcFirstLastPara="1" rIns="91425" wrap="square" tIns="91425">
+            <a:noAutofit/>
+          </a:bodyPr>
+          <a:lstStyle/>
+          <a:p>
+            <a:pPr indent="0" lvl="0" marL="0" rtl="0" algn="l">
+              <a:spcBef>
+                <a:spcPts val="0"/>
+              </a:spcBef>
+              <a:spcAft>
+                <a:spcPts val="0"/>
+              </a:spcAft>
+              <a:buNone/>
+            </a:pPr>
+            <a:r>
+              <a:rPr b="1" i="1" lang="en" sz="2000"/>
+              <a:t>Лабораторная 5</a:t>
+            </a:r>
+            <a:endParaRPr b="1" i="1" sz="2000"/>
+          </a:p>
+        </p:txBody>
+      </p:sp>
+    </p:spTree>
+  </p:cSld>
+  <p:clrMapOvr>
+    <a:masterClrMapping/>
+  </p:clrMapOvr>
+</p:sld>
+</file>
+
+<file path=ppt/slides/slide22.xml><?xml version="1.0" encoding="utf-8"?>
+<p:sld xmlns:a="http://schemas.openxmlformats.org/drawingml/2006/main" xmlns:r="http://schemas.openxmlformats.org/officeDocument/2006/relationships" xmlns:mc="http://schemas.openxmlformats.org/markup-compatibility/2006" xmlns:mv="urn:schemas-microsoft-com:mac:vml" xmlns:p="http://schemas.openxmlformats.org/presentationml/2006/main" xmlns:c="http://schemas.openxmlformats.org/drawingml/2006/chart" xmlns:dgm="http://schemas.openxmlformats.org/drawingml/2006/diagram" xmlns:o="urn:schemas-microsoft-com:office:office" xmlns:v="urn:schemas-microsoft-com:vml" xmlns:pvml="urn:schemas-microsoft-com:office:powerpoint" xmlns:com="http://schemas.openxmlformats.org/drawingml/2006/compatibility" xmlns:p14="http://schemas.microsoft.com/office/powerpoint/2010/main" xmlns:p15="http://schemas.microsoft.com/office/powerpoint/2012/main" xmlns:ahyp="http://schemas.microsoft.com/office/drawing/2018/hyperlinkcolor">
+  <p:cSld>
+    <p:spTree>
+      <p:nvGrpSpPr>
+        <p:cNvPr id="230" name="Shape 230"/>
+        <p:cNvGrpSpPr/>
+        <p:nvPr/>
+      </p:nvGrpSpPr>
+      <p:grpSpPr>
+        <a:xfrm>
+          <a:off x="0" y="0"/>
+          <a:ext cx="0" cy="0"/>
+          <a:chOff x="0" y="0"/>
+          <a:chExt cx="0" cy="0"/>
+        </a:xfrm>
+      </p:grpSpPr>
+      <p:grpSp>
+        <p:nvGrpSpPr>
+          <p:cNvPr id="231" name="Google Shape;231;p36"/>
+          <p:cNvGrpSpPr/>
+          <p:nvPr/>
+        </p:nvGrpSpPr>
+        <p:grpSpPr>
+          <a:xfrm>
+            <a:off x="6208775" y="684625"/>
+            <a:ext cx="1782900" cy="1847400"/>
+            <a:chOff x="6818375" y="2513425"/>
+            <a:chExt cx="1782900" cy="1847400"/>
+          </a:xfrm>
+        </p:grpSpPr>
+        <p:sp>
+          <p:nvSpPr>
+            <p:cNvPr id="232" name="Google Shape;232;p36"/>
+            <p:cNvSpPr/>
+            <p:nvPr/>
+          </p:nvSpPr>
+          <p:spPr>
+            <a:xfrm>
+              <a:off x="6818375" y="2513425"/>
+              <a:ext cx="568200" cy="475800"/>
+            </a:xfrm>
+            <a:prstGeom prst="rect">
+              <a:avLst/>
+            </a:prstGeom>
+            <a:solidFill>
+              <a:srgbClr val="D9EAD3"/>
+            </a:solidFill>
+            <a:ln cap="flat" cmpd="sng" w="9525">
+              <a:solidFill>
+                <a:schemeClr val="dk2"/>
+              </a:solidFill>
+              <a:prstDash val="solid"/>
+              <a:round/>
+              <a:headEnd len="sm" w="sm" type="none"/>
+              <a:tailEnd len="sm" w="sm" type="none"/>
+            </a:ln>
+          </p:spPr>
+          <p:txBody>
+            <a:bodyPr anchorCtr="0" anchor="ctr" bIns="91425" lIns="91425" spcFirstLastPara="1" rIns="91425" wrap="square" tIns="91425">
+              <a:noAutofit/>
+            </a:bodyPr>
+            <a:lstStyle/>
+            <a:p>
+              <a:pPr indent="0" lvl="0" marL="0" rtl="0" algn="l">
+                <a:spcBef>
+                  <a:spcPts val="0"/>
+                </a:spcBef>
+                <a:spcAft>
+                  <a:spcPts val="0"/>
+                </a:spcAft>
+                <a:buNone/>
+              </a:pPr>
+              <a:r>
+                <a:rPr lang="en" sz="1800"/>
+                <a:t>  a</a:t>
+              </a:r>
+              <a:r>
+                <a:rPr baseline="-25000" lang="en" sz="1800"/>
+                <a:t>0</a:t>
+              </a:r>
+              <a:endParaRPr baseline="-25000" sz="1800"/>
+            </a:p>
+          </p:txBody>
+        </p:sp>
+        <p:sp>
+          <p:nvSpPr>
+            <p:cNvPr id="233" name="Google Shape;233;p36"/>
+            <p:cNvSpPr/>
+            <p:nvPr/>
+          </p:nvSpPr>
+          <p:spPr>
+            <a:xfrm>
+              <a:off x="7351775" y="2513425"/>
+              <a:ext cx="568200" cy="475800"/>
+            </a:xfrm>
+            <a:prstGeom prst="rect">
+              <a:avLst/>
+            </a:prstGeom>
+            <a:solidFill>
+              <a:srgbClr val="D9EAD3"/>
+            </a:solidFill>
+            <a:ln cap="flat" cmpd="sng" w="9525">
+              <a:solidFill>
+                <a:schemeClr val="dk2"/>
+              </a:solidFill>
+              <a:prstDash val="solid"/>
+              <a:round/>
+              <a:headEnd len="sm" w="sm" type="none"/>
+              <a:tailEnd len="sm" w="sm" type="none"/>
+            </a:ln>
+          </p:spPr>
+          <p:txBody>
+            <a:bodyPr anchorCtr="0" anchor="ctr" bIns="91425" lIns="91425" spcFirstLastPara="1" rIns="91425" wrap="square" tIns="91425">
+              <a:noAutofit/>
+            </a:bodyPr>
+            <a:lstStyle/>
+            <a:p>
+              <a:pPr indent="0" lvl="0" marL="0" rtl="0" algn="l">
+                <a:spcBef>
+                  <a:spcPts val="0"/>
+                </a:spcBef>
+                <a:spcAft>
+                  <a:spcPts val="0"/>
+                </a:spcAft>
+                <a:buNone/>
+              </a:pPr>
+              <a:r>
+                <a:rPr lang="en" sz="1800"/>
+                <a:t>  a</a:t>
+              </a:r>
+              <a:r>
+                <a:rPr baseline="-25000" lang="en" sz="1800"/>
+                <a:t>4</a:t>
+              </a:r>
+              <a:endParaRPr baseline="-25000" sz="1800"/>
+            </a:p>
+          </p:txBody>
+        </p:sp>
+        <p:sp>
+          <p:nvSpPr>
+            <p:cNvPr id="234" name="Google Shape;234;p36"/>
+            <p:cNvSpPr/>
+            <p:nvPr/>
+          </p:nvSpPr>
+          <p:spPr>
+            <a:xfrm>
+              <a:off x="7885175" y="2513425"/>
+              <a:ext cx="716100" cy="475800"/>
+            </a:xfrm>
+            <a:prstGeom prst="rect">
+              <a:avLst/>
+            </a:prstGeom>
+            <a:solidFill>
+              <a:srgbClr val="D9EAD3"/>
+            </a:solidFill>
+            <a:ln cap="flat" cmpd="sng" w="9525">
+              <a:solidFill>
+                <a:schemeClr val="dk2"/>
+              </a:solidFill>
+              <a:prstDash val="solid"/>
+              <a:round/>
+              <a:headEnd len="sm" w="sm" type="none"/>
+              <a:tailEnd len="sm" w="sm" type="none"/>
+            </a:ln>
+          </p:spPr>
+          <p:txBody>
+            <a:bodyPr anchorCtr="0" anchor="ctr" bIns="91425" lIns="91425" spcFirstLastPara="1" rIns="91425" wrap="square" tIns="91425">
+              <a:noAutofit/>
+            </a:bodyPr>
+            <a:lstStyle/>
+            <a:p>
+              <a:pPr indent="0" lvl="0" marL="0" rtl="0" algn="l">
+                <a:spcBef>
+                  <a:spcPts val="0"/>
+                </a:spcBef>
+                <a:spcAft>
+                  <a:spcPts val="0"/>
+                </a:spcAft>
+                <a:buNone/>
+              </a:pPr>
+              <a:r>
+                <a:rPr lang="en" sz="1800"/>
+                <a:t>  a</a:t>
+              </a:r>
+              <a:r>
+                <a:rPr baseline="-25000" lang="en" sz="1800"/>
+                <a:t>8</a:t>
+              </a:r>
+              <a:endParaRPr baseline="-25000" sz="1800"/>
+            </a:p>
+          </p:txBody>
+        </p:sp>
+        <p:sp>
+          <p:nvSpPr>
+            <p:cNvPr id="235" name="Google Shape;235;p36"/>
+            <p:cNvSpPr/>
+            <p:nvPr/>
+          </p:nvSpPr>
+          <p:spPr>
+            <a:xfrm>
+              <a:off x="6818375" y="2970625"/>
+              <a:ext cx="568200" cy="475800"/>
+            </a:xfrm>
+            <a:prstGeom prst="rect">
+              <a:avLst/>
+            </a:prstGeom>
+            <a:solidFill>
+              <a:srgbClr val="D9EAD3"/>
+            </a:solidFill>
+            <a:ln cap="flat" cmpd="sng" w="9525">
+              <a:solidFill>
+                <a:schemeClr val="dk2"/>
+              </a:solidFill>
+              <a:prstDash val="solid"/>
+              <a:round/>
+              <a:headEnd len="sm" w="sm" type="none"/>
+              <a:tailEnd len="sm" w="sm" type="none"/>
+            </a:ln>
+          </p:spPr>
+          <p:txBody>
+            <a:bodyPr anchorCtr="0" anchor="ctr" bIns="91425" lIns="91425" spcFirstLastPara="1" rIns="91425" wrap="square" tIns="91425">
+              <a:noAutofit/>
+            </a:bodyPr>
+            <a:lstStyle/>
+            <a:p>
+              <a:pPr indent="0" lvl="0" marL="0" rtl="0" algn="l">
+                <a:spcBef>
+                  <a:spcPts val="0"/>
+                </a:spcBef>
+                <a:spcAft>
+                  <a:spcPts val="0"/>
+                </a:spcAft>
+                <a:buNone/>
+              </a:pPr>
+              <a:r>
+                <a:rPr lang="en" sz="1800"/>
+                <a:t>  a</a:t>
+              </a:r>
+              <a:r>
+                <a:rPr baseline="-25000" lang="en" sz="1800"/>
+                <a:t>1</a:t>
+              </a:r>
+              <a:endParaRPr baseline="-25000" sz="1800"/>
+            </a:p>
+          </p:txBody>
+        </p:sp>
+        <p:sp>
+          <p:nvSpPr>
+            <p:cNvPr id="236" name="Google Shape;236;p36"/>
+            <p:cNvSpPr/>
+            <p:nvPr/>
+          </p:nvSpPr>
+          <p:spPr>
+            <a:xfrm>
+              <a:off x="7351775" y="2970625"/>
+              <a:ext cx="568200" cy="475800"/>
+            </a:xfrm>
+            <a:prstGeom prst="rect">
+              <a:avLst/>
+            </a:prstGeom>
+            <a:solidFill>
+              <a:srgbClr val="D9EAD3"/>
+            </a:solidFill>
+            <a:ln cap="flat" cmpd="sng" w="9525">
+              <a:solidFill>
+                <a:schemeClr val="dk2"/>
+              </a:solidFill>
+              <a:prstDash val="solid"/>
+              <a:round/>
+              <a:headEnd len="sm" w="sm" type="none"/>
+              <a:tailEnd len="sm" w="sm" type="none"/>
+            </a:ln>
+          </p:spPr>
+          <p:txBody>
+            <a:bodyPr anchorCtr="0" anchor="ctr" bIns="91425" lIns="91425" spcFirstLastPara="1" rIns="91425" wrap="square" tIns="91425">
+              <a:noAutofit/>
+            </a:bodyPr>
+            <a:lstStyle/>
+            <a:p>
+              <a:pPr indent="0" lvl="0" marL="0" rtl="0" algn="l">
+                <a:spcBef>
+                  <a:spcPts val="0"/>
+                </a:spcBef>
+                <a:spcAft>
+                  <a:spcPts val="0"/>
+                </a:spcAft>
+                <a:buNone/>
+              </a:pPr>
+              <a:r>
+                <a:rPr lang="en" sz="1800"/>
+                <a:t>  a</a:t>
+              </a:r>
+              <a:r>
+                <a:rPr baseline="-25000" lang="en" sz="1800"/>
+                <a:t>5</a:t>
+              </a:r>
+              <a:endParaRPr baseline="-25000" sz="1800"/>
+            </a:p>
+          </p:txBody>
+        </p:sp>
+        <p:sp>
+          <p:nvSpPr>
+            <p:cNvPr id="237" name="Google Shape;237;p36"/>
+            <p:cNvSpPr/>
+            <p:nvPr/>
+          </p:nvSpPr>
+          <p:spPr>
+            <a:xfrm>
+              <a:off x="7885175" y="2970625"/>
+              <a:ext cx="716100" cy="475800"/>
+            </a:xfrm>
+            <a:prstGeom prst="rect">
+              <a:avLst/>
+            </a:prstGeom>
+            <a:solidFill>
+              <a:srgbClr val="D9EAD3"/>
+            </a:solidFill>
+            <a:ln cap="flat" cmpd="sng" w="9525">
+              <a:solidFill>
+                <a:schemeClr val="dk2"/>
+              </a:solidFill>
+              <a:prstDash val="solid"/>
+              <a:round/>
+              <a:headEnd len="sm" w="sm" type="none"/>
+              <a:tailEnd len="sm" w="sm" type="none"/>
+            </a:ln>
+          </p:spPr>
+          <p:txBody>
+            <a:bodyPr anchorCtr="0" anchor="ctr" bIns="91425" lIns="91425" spcFirstLastPara="1" rIns="91425" wrap="square" tIns="91425">
+              <a:noAutofit/>
+            </a:bodyPr>
+            <a:lstStyle/>
+            <a:p>
+              <a:pPr indent="0" lvl="0" marL="0" rtl="0" algn="l">
+                <a:spcBef>
+                  <a:spcPts val="0"/>
+                </a:spcBef>
+                <a:spcAft>
+                  <a:spcPts val="0"/>
+                </a:spcAft>
+                <a:buNone/>
+              </a:pPr>
+              <a:r>
+                <a:rPr lang="en" sz="1800"/>
+                <a:t>  a</a:t>
+              </a:r>
+              <a:r>
+                <a:rPr baseline="-25000" lang="en" sz="1800"/>
+                <a:t>9</a:t>
+              </a:r>
+              <a:endParaRPr baseline="-25000" sz="1800"/>
+            </a:p>
+          </p:txBody>
+        </p:sp>
+        <p:sp>
+          <p:nvSpPr>
+            <p:cNvPr id="238" name="Google Shape;238;p36"/>
+            <p:cNvSpPr/>
+            <p:nvPr/>
+          </p:nvSpPr>
+          <p:spPr>
+            <a:xfrm>
+              <a:off x="6818375" y="3427825"/>
+              <a:ext cx="568200" cy="475800"/>
+            </a:xfrm>
+            <a:prstGeom prst="rect">
+              <a:avLst/>
+            </a:prstGeom>
+            <a:solidFill>
+              <a:srgbClr val="D9EAD3"/>
+            </a:solidFill>
+            <a:ln cap="flat" cmpd="sng" w="9525">
+              <a:solidFill>
+                <a:schemeClr val="dk2"/>
+              </a:solidFill>
+              <a:prstDash val="solid"/>
+              <a:round/>
+              <a:headEnd len="sm" w="sm" type="none"/>
+              <a:tailEnd len="sm" w="sm" type="none"/>
+            </a:ln>
+          </p:spPr>
+          <p:txBody>
+            <a:bodyPr anchorCtr="0" anchor="ctr" bIns="91425" lIns="91425" spcFirstLastPara="1" rIns="91425" wrap="square" tIns="91425">
+              <a:noAutofit/>
+            </a:bodyPr>
+            <a:lstStyle/>
+            <a:p>
+              <a:pPr indent="0" lvl="0" marL="0" rtl="0" algn="l">
+                <a:spcBef>
+                  <a:spcPts val="0"/>
+                </a:spcBef>
+                <a:spcAft>
+                  <a:spcPts val="0"/>
+                </a:spcAft>
+                <a:buNone/>
+              </a:pPr>
+              <a:r>
+                <a:rPr lang="en" sz="1800"/>
+                <a:t>  a</a:t>
+              </a:r>
+              <a:r>
+                <a:rPr baseline="-25000" lang="en" sz="1800"/>
+                <a:t>2</a:t>
+              </a:r>
+              <a:endParaRPr baseline="-25000" sz="1800"/>
+            </a:p>
+          </p:txBody>
+        </p:sp>
+        <p:sp>
+          <p:nvSpPr>
+            <p:cNvPr id="239" name="Google Shape;239;p36"/>
+            <p:cNvSpPr/>
+            <p:nvPr/>
+          </p:nvSpPr>
+          <p:spPr>
+            <a:xfrm>
+              <a:off x="7351775" y="3427825"/>
+              <a:ext cx="568200" cy="475800"/>
+            </a:xfrm>
+            <a:prstGeom prst="rect">
+              <a:avLst/>
+            </a:prstGeom>
+            <a:solidFill>
+              <a:srgbClr val="D9EAD3"/>
+            </a:solidFill>
+            <a:ln cap="flat" cmpd="sng" w="9525">
+              <a:solidFill>
+                <a:schemeClr val="dk2"/>
+              </a:solidFill>
+              <a:prstDash val="solid"/>
+              <a:round/>
+              <a:headEnd len="sm" w="sm" type="none"/>
+              <a:tailEnd len="sm" w="sm" type="none"/>
+            </a:ln>
+          </p:spPr>
+          <p:txBody>
+            <a:bodyPr anchorCtr="0" anchor="ctr" bIns="91425" lIns="91425" spcFirstLastPara="1" rIns="91425" wrap="square" tIns="91425">
+              <a:noAutofit/>
+            </a:bodyPr>
+            <a:lstStyle/>
+            <a:p>
+              <a:pPr indent="0" lvl="0" marL="0" rtl="0" algn="l">
+                <a:spcBef>
+                  <a:spcPts val="0"/>
+                </a:spcBef>
+                <a:spcAft>
+                  <a:spcPts val="0"/>
+                </a:spcAft>
+                <a:buNone/>
+              </a:pPr>
+              <a:r>
+                <a:rPr lang="en" sz="1800"/>
+                <a:t>  a</a:t>
+              </a:r>
+              <a:r>
+                <a:rPr baseline="-25000" lang="en" sz="1800"/>
+                <a:t>6</a:t>
+              </a:r>
+              <a:endParaRPr baseline="-25000" sz="1800"/>
+            </a:p>
+          </p:txBody>
+        </p:sp>
+        <p:sp>
+          <p:nvSpPr>
+            <p:cNvPr id="240" name="Google Shape;240;p36"/>
+            <p:cNvSpPr/>
+            <p:nvPr/>
+          </p:nvSpPr>
+          <p:spPr>
+            <a:xfrm>
+              <a:off x="7885175" y="3427825"/>
+              <a:ext cx="716100" cy="475800"/>
+            </a:xfrm>
+            <a:prstGeom prst="rect">
+              <a:avLst/>
+            </a:prstGeom>
+            <a:solidFill>
+              <a:srgbClr val="D9EAD3"/>
+            </a:solidFill>
+            <a:ln cap="flat" cmpd="sng" w="9525">
+              <a:solidFill>
+                <a:schemeClr val="dk2"/>
+              </a:solidFill>
+              <a:prstDash val="solid"/>
+              <a:round/>
+              <a:headEnd len="sm" w="sm" type="none"/>
+              <a:tailEnd len="sm" w="sm" type="none"/>
+            </a:ln>
+          </p:spPr>
+          <p:txBody>
+            <a:bodyPr anchorCtr="0" anchor="ctr" bIns="91425" lIns="91425" spcFirstLastPara="1" rIns="91425" wrap="square" tIns="91425">
+              <a:noAutofit/>
+            </a:bodyPr>
+            <a:lstStyle/>
+            <a:p>
+              <a:pPr indent="0" lvl="0" marL="0" rtl="0" algn="l">
+                <a:spcBef>
+                  <a:spcPts val="0"/>
+                </a:spcBef>
+                <a:spcAft>
+                  <a:spcPts val="0"/>
+                </a:spcAft>
+                <a:buNone/>
+              </a:pPr>
+              <a:r>
+                <a:rPr lang="en" sz="1800"/>
+                <a:t>  a</a:t>
+              </a:r>
+              <a:r>
+                <a:rPr baseline="-25000" lang="en" sz="1800"/>
+                <a:t>10</a:t>
+              </a:r>
+              <a:endParaRPr baseline="-25000" sz="1800"/>
+            </a:p>
+          </p:txBody>
+        </p:sp>
+        <p:sp>
+          <p:nvSpPr>
+            <p:cNvPr id="241" name="Google Shape;241;p36"/>
+            <p:cNvSpPr/>
+            <p:nvPr/>
+          </p:nvSpPr>
+          <p:spPr>
+            <a:xfrm>
+              <a:off x="6818375" y="3885025"/>
+              <a:ext cx="568200" cy="475800"/>
+            </a:xfrm>
+            <a:prstGeom prst="rect">
+              <a:avLst/>
+            </a:prstGeom>
+            <a:solidFill>
+              <a:srgbClr val="D9EAD3"/>
+            </a:solidFill>
+            <a:ln cap="flat" cmpd="sng" w="9525">
+              <a:solidFill>
+                <a:schemeClr val="dk2"/>
+              </a:solidFill>
+              <a:prstDash val="solid"/>
+              <a:round/>
+              <a:headEnd len="sm" w="sm" type="none"/>
+              <a:tailEnd len="sm" w="sm" type="none"/>
+            </a:ln>
+          </p:spPr>
+          <p:txBody>
+            <a:bodyPr anchorCtr="0" anchor="ctr" bIns="91425" lIns="91425" spcFirstLastPara="1" rIns="91425" wrap="square" tIns="91425">
+              <a:noAutofit/>
+            </a:bodyPr>
+            <a:lstStyle/>
+            <a:p>
+              <a:pPr indent="0" lvl="0" marL="0" rtl="0" algn="l">
+                <a:spcBef>
+                  <a:spcPts val="0"/>
+                </a:spcBef>
+                <a:spcAft>
+                  <a:spcPts val="0"/>
+                </a:spcAft>
+                <a:buNone/>
+              </a:pPr>
+              <a:r>
+                <a:rPr lang="en" sz="1800"/>
+                <a:t>  a</a:t>
+              </a:r>
+              <a:r>
+                <a:rPr baseline="-25000" lang="en" sz="1800"/>
+                <a:t>3</a:t>
+              </a:r>
+              <a:endParaRPr baseline="-25000" sz="1800"/>
+            </a:p>
+          </p:txBody>
+        </p:sp>
+        <p:sp>
+          <p:nvSpPr>
+            <p:cNvPr id="242" name="Google Shape;242;p36"/>
+            <p:cNvSpPr/>
+            <p:nvPr/>
+          </p:nvSpPr>
+          <p:spPr>
+            <a:xfrm>
+              <a:off x="7351775" y="3885025"/>
+              <a:ext cx="533400" cy="475800"/>
+            </a:xfrm>
+            <a:prstGeom prst="rect">
+              <a:avLst/>
+            </a:prstGeom>
+            <a:solidFill>
+              <a:srgbClr val="D9EAD3"/>
+            </a:solidFill>
+            <a:ln cap="flat" cmpd="sng" w="9525">
+              <a:solidFill>
+                <a:schemeClr val="dk2"/>
+              </a:solidFill>
+              <a:prstDash val="solid"/>
+              <a:round/>
+              <a:headEnd len="sm" w="sm" type="none"/>
+              <a:tailEnd len="sm" w="sm" type="none"/>
+            </a:ln>
+          </p:spPr>
+          <p:txBody>
+            <a:bodyPr anchorCtr="0" anchor="ctr" bIns="91425" lIns="91425" spcFirstLastPara="1" rIns="91425" wrap="square" tIns="91425">
+              <a:noAutofit/>
+            </a:bodyPr>
+            <a:lstStyle/>
+            <a:p>
+              <a:pPr indent="0" lvl="0" marL="0" rtl="0" algn="l">
+                <a:spcBef>
+                  <a:spcPts val="0"/>
+                </a:spcBef>
+                <a:spcAft>
+                  <a:spcPts val="0"/>
+                </a:spcAft>
+                <a:buNone/>
+              </a:pPr>
+              <a:r>
+                <a:rPr lang="en" sz="1800"/>
+                <a:t>  a</a:t>
+              </a:r>
+              <a:r>
+                <a:rPr baseline="-25000" lang="en" sz="1800"/>
+                <a:t>7</a:t>
+              </a:r>
+              <a:endParaRPr baseline="-25000" sz="1800"/>
+            </a:p>
+          </p:txBody>
+        </p:sp>
+        <p:sp>
+          <p:nvSpPr>
+            <p:cNvPr id="243" name="Google Shape;243;p36"/>
+            <p:cNvSpPr/>
+            <p:nvPr/>
+          </p:nvSpPr>
+          <p:spPr>
+            <a:xfrm>
+              <a:off x="7885175" y="3885025"/>
+              <a:ext cx="716100" cy="475800"/>
+            </a:xfrm>
+            <a:prstGeom prst="rect">
+              <a:avLst/>
+            </a:prstGeom>
+            <a:solidFill>
+              <a:srgbClr val="D9EAD3"/>
+            </a:solidFill>
+            <a:ln cap="flat" cmpd="sng" w="9525">
+              <a:solidFill>
+                <a:schemeClr val="dk2"/>
+              </a:solidFill>
+              <a:prstDash val="solid"/>
+              <a:round/>
+              <a:headEnd len="sm" w="sm" type="none"/>
+              <a:tailEnd len="sm" w="sm" type="none"/>
+            </a:ln>
+          </p:spPr>
+          <p:txBody>
+            <a:bodyPr anchorCtr="0" anchor="ctr" bIns="91425" lIns="91425" spcFirstLastPara="1" rIns="91425" wrap="square" tIns="91425">
+              <a:noAutofit/>
+            </a:bodyPr>
+            <a:lstStyle/>
+            <a:p>
+              <a:pPr indent="0" lvl="0" marL="0" rtl="0" algn="l">
+                <a:spcBef>
+                  <a:spcPts val="0"/>
+                </a:spcBef>
+                <a:spcAft>
+                  <a:spcPts val="0"/>
+                </a:spcAft>
+                <a:buNone/>
+              </a:pPr>
+              <a:r>
+                <a:rPr lang="en" sz="1800"/>
+                <a:t>  a</a:t>
+              </a:r>
+              <a:r>
+                <a:rPr baseline="-25000" lang="en" sz="1800"/>
+                <a:t>11</a:t>
+              </a:r>
+              <a:endParaRPr baseline="-25000" sz="1800"/>
+            </a:p>
+          </p:txBody>
+        </p:sp>
+      </p:grpSp>
+      <p:grpSp>
+        <p:nvGrpSpPr>
+          <p:cNvPr id="244" name="Google Shape;244;p36"/>
+          <p:cNvGrpSpPr/>
+          <p:nvPr/>
+        </p:nvGrpSpPr>
+        <p:grpSpPr>
+          <a:xfrm>
+            <a:off x="708275" y="812800"/>
+            <a:ext cx="2320800" cy="1390200"/>
+            <a:chOff x="251075" y="965200"/>
+            <a:chExt cx="2320800" cy="1390200"/>
+          </a:xfrm>
+        </p:grpSpPr>
+        <p:sp>
+          <p:nvSpPr>
+            <p:cNvPr id="245" name="Google Shape;245;p36"/>
+            <p:cNvSpPr/>
+            <p:nvPr/>
+          </p:nvSpPr>
+          <p:spPr>
+            <a:xfrm>
+              <a:off x="251075" y="965200"/>
+              <a:ext cx="568200" cy="475800"/>
+            </a:xfrm>
+            <a:prstGeom prst="rect">
+              <a:avLst/>
+            </a:prstGeom>
+            <a:solidFill>
+              <a:srgbClr val="D9EAD3"/>
+            </a:solidFill>
+            <a:ln cap="flat" cmpd="sng" w="9525">
+              <a:solidFill>
+                <a:schemeClr val="dk2"/>
+              </a:solidFill>
+              <a:prstDash val="solid"/>
+              <a:round/>
+              <a:headEnd len="sm" w="sm" type="none"/>
+              <a:tailEnd len="sm" w="sm" type="none"/>
+            </a:ln>
+          </p:spPr>
+          <p:txBody>
+            <a:bodyPr anchorCtr="0" anchor="ctr" bIns="91425" lIns="91425" spcFirstLastPara="1" rIns="91425" wrap="square" tIns="91425">
+              <a:noAutofit/>
+            </a:bodyPr>
+            <a:lstStyle/>
+            <a:p>
+              <a:pPr indent="0" lvl="0" marL="0" rtl="0" algn="l">
+                <a:spcBef>
+                  <a:spcPts val="0"/>
+                </a:spcBef>
+                <a:spcAft>
+                  <a:spcPts val="0"/>
+                </a:spcAft>
+                <a:buNone/>
+              </a:pPr>
+              <a:r>
+                <a:rPr lang="en" sz="1800"/>
+                <a:t>  a</a:t>
+              </a:r>
+              <a:r>
+                <a:rPr baseline="-25000" lang="en" sz="1800"/>
+                <a:t>0</a:t>
+              </a:r>
+              <a:endParaRPr baseline="-25000" sz="1800"/>
+            </a:p>
+          </p:txBody>
+        </p:sp>
+        <p:sp>
+          <p:nvSpPr>
+            <p:cNvPr id="246" name="Google Shape;246;p36"/>
+            <p:cNvSpPr/>
+            <p:nvPr/>
+          </p:nvSpPr>
+          <p:spPr>
+            <a:xfrm>
+              <a:off x="784475" y="965200"/>
+              <a:ext cx="568200" cy="475800"/>
+            </a:xfrm>
+            <a:prstGeom prst="rect">
+              <a:avLst/>
+            </a:prstGeom>
+            <a:solidFill>
+              <a:srgbClr val="D9EAD3"/>
+            </a:solidFill>
+            <a:ln cap="flat" cmpd="sng" w="9525">
+              <a:solidFill>
+                <a:schemeClr val="dk2"/>
+              </a:solidFill>
+              <a:prstDash val="solid"/>
+              <a:round/>
+              <a:headEnd len="sm" w="sm" type="none"/>
+              <a:tailEnd len="sm" w="sm" type="none"/>
+            </a:ln>
+          </p:spPr>
+          <p:txBody>
+            <a:bodyPr anchorCtr="0" anchor="ctr" bIns="91425" lIns="91425" spcFirstLastPara="1" rIns="91425" wrap="square" tIns="91425">
+              <a:noAutofit/>
+            </a:bodyPr>
+            <a:lstStyle/>
+            <a:p>
+              <a:pPr indent="0" lvl="0" marL="0" rtl="0" algn="l">
+                <a:spcBef>
+                  <a:spcPts val="0"/>
+                </a:spcBef>
+                <a:spcAft>
+                  <a:spcPts val="0"/>
+                </a:spcAft>
+                <a:buNone/>
+              </a:pPr>
+              <a:r>
+                <a:rPr lang="en" sz="1800"/>
+                <a:t>  a</a:t>
+              </a:r>
+              <a:r>
+                <a:rPr baseline="-25000" lang="en" sz="1800"/>
+                <a:t>1</a:t>
+              </a:r>
+              <a:endParaRPr baseline="-25000" sz="1800"/>
+            </a:p>
+          </p:txBody>
+        </p:sp>
+        <p:sp>
+          <p:nvSpPr>
+            <p:cNvPr id="247" name="Google Shape;247;p36"/>
+            <p:cNvSpPr/>
+            <p:nvPr/>
+          </p:nvSpPr>
+          <p:spPr>
+            <a:xfrm>
+              <a:off x="1317875" y="965200"/>
+              <a:ext cx="568200" cy="475800"/>
+            </a:xfrm>
+            <a:prstGeom prst="rect">
+              <a:avLst/>
+            </a:prstGeom>
+            <a:solidFill>
+              <a:srgbClr val="D9EAD3"/>
+            </a:solidFill>
+            <a:ln cap="flat" cmpd="sng" w="9525">
+              <a:solidFill>
+                <a:schemeClr val="dk2"/>
+              </a:solidFill>
+              <a:prstDash val="solid"/>
+              <a:round/>
+              <a:headEnd len="sm" w="sm" type="none"/>
+              <a:tailEnd len="sm" w="sm" type="none"/>
+            </a:ln>
+          </p:spPr>
+          <p:txBody>
+            <a:bodyPr anchorCtr="0" anchor="ctr" bIns="91425" lIns="91425" spcFirstLastPara="1" rIns="91425" wrap="square" tIns="91425">
+              <a:noAutofit/>
+            </a:bodyPr>
+            <a:lstStyle/>
+            <a:p>
+              <a:pPr indent="0" lvl="0" marL="0" rtl="0" algn="l">
+                <a:spcBef>
+                  <a:spcPts val="0"/>
+                </a:spcBef>
+                <a:spcAft>
+                  <a:spcPts val="0"/>
+                </a:spcAft>
+                <a:buNone/>
+              </a:pPr>
+              <a:r>
+                <a:rPr lang="en" sz="1800"/>
+                <a:t>  a</a:t>
+              </a:r>
+              <a:r>
+                <a:rPr baseline="-25000" lang="en" sz="1800"/>
+                <a:t>2</a:t>
+              </a:r>
+              <a:endParaRPr baseline="-25000" sz="1800"/>
+            </a:p>
+          </p:txBody>
+        </p:sp>
+        <p:sp>
+          <p:nvSpPr>
+            <p:cNvPr id="248" name="Google Shape;248;p36"/>
+            <p:cNvSpPr/>
+            <p:nvPr/>
+          </p:nvSpPr>
+          <p:spPr>
+            <a:xfrm>
+              <a:off x="1851275" y="965200"/>
+              <a:ext cx="716100" cy="475800"/>
+            </a:xfrm>
+            <a:prstGeom prst="rect">
+              <a:avLst/>
+            </a:prstGeom>
+            <a:solidFill>
+              <a:srgbClr val="D9EAD3"/>
+            </a:solidFill>
+            <a:ln cap="flat" cmpd="sng" w="9525">
+              <a:solidFill>
+                <a:schemeClr val="dk2"/>
+              </a:solidFill>
+              <a:prstDash val="solid"/>
+              <a:round/>
+              <a:headEnd len="sm" w="sm" type="none"/>
+              <a:tailEnd len="sm" w="sm" type="none"/>
+            </a:ln>
+          </p:spPr>
+          <p:txBody>
+            <a:bodyPr anchorCtr="0" anchor="ctr" bIns="91425" lIns="91425" spcFirstLastPara="1" rIns="91425" wrap="square" tIns="91425">
+              <a:noAutofit/>
+            </a:bodyPr>
+            <a:lstStyle/>
+            <a:p>
+              <a:pPr indent="0" lvl="0" marL="0" rtl="0" algn="l">
+                <a:spcBef>
+                  <a:spcPts val="0"/>
+                </a:spcBef>
+                <a:spcAft>
+                  <a:spcPts val="0"/>
+                </a:spcAft>
+                <a:buNone/>
+              </a:pPr>
+              <a:r>
+                <a:rPr lang="en" sz="1800"/>
+                <a:t>  a</a:t>
+              </a:r>
+              <a:r>
+                <a:rPr baseline="-25000" lang="en" sz="1800"/>
+                <a:t>3</a:t>
+              </a:r>
+              <a:endParaRPr baseline="-25000" sz="1800"/>
+            </a:p>
+          </p:txBody>
+        </p:sp>
+        <p:sp>
+          <p:nvSpPr>
+            <p:cNvPr id="249" name="Google Shape;249;p36"/>
+            <p:cNvSpPr/>
+            <p:nvPr/>
+          </p:nvSpPr>
+          <p:spPr>
+            <a:xfrm>
+              <a:off x="251075" y="1422400"/>
+              <a:ext cx="568200" cy="475800"/>
+            </a:xfrm>
+            <a:prstGeom prst="rect">
+              <a:avLst/>
+            </a:prstGeom>
+            <a:solidFill>
+              <a:srgbClr val="D9EAD3"/>
+            </a:solidFill>
+            <a:ln cap="flat" cmpd="sng" w="9525">
+              <a:solidFill>
+                <a:schemeClr val="dk2"/>
+              </a:solidFill>
+              <a:prstDash val="solid"/>
+              <a:round/>
+              <a:headEnd len="sm" w="sm" type="none"/>
+              <a:tailEnd len="sm" w="sm" type="none"/>
+            </a:ln>
+          </p:spPr>
+          <p:txBody>
+            <a:bodyPr anchorCtr="0" anchor="ctr" bIns="91425" lIns="91425" spcFirstLastPara="1" rIns="91425" wrap="square" tIns="91425">
+              <a:noAutofit/>
+            </a:bodyPr>
+            <a:lstStyle/>
+            <a:p>
+              <a:pPr indent="0" lvl="0" marL="0" rtl="0" algn="l">
+                <a:spcBef>
+                  <a:spcPts val="0"/>
+                </a:spcBef>
+                <a:spcAft>
+                  <a:spcPts val="0"/>
+                </a:spcAft>
+                <a:buNone/>
+              </a:pPr>
+              <a:r>
+                <a:rPr lang="en" sz="1800"/>
+                <a:t>  a</a:t>
+              </a:r>
+              <a:r>
+                <a:rPr baseline="-25000" lang="en" sz="1800"/>
+                <a:t>4</a:t>
+              </a:r>
+              <a:endParaRPr baseline="-25000" sz="1800"/>
+            </a:p>
+          </p:txBody>
+        </p:sp>
+        <p:sp>
+          <p:nvSpPr>
+            <p:cNvPr id="250" name="Google Shape;250;p36"/>
+            <p:cNvSpPr/>
+            <p:nvPr/>
+          </p:nvSpPr>
+          <p:spPr>
+            <a:xfrm>
+              <a:off x="784475" y="1422400"/>
+              <a:ext cx="568200" cy="475800"/>
+            </a:xfrm>
+            <a:prstGeom prst="rect">
+              <a:avLst/>
+            </a:prstGeom>
+            <a:solidFill>
+              <a:srgbClr val="D9EAD3"/>
+            </a:solidFill>
+            <a:ln cap="flat" cmpd="sng" w="9525">
+              <a:solidFill>
+                <a:schemeClr val="dk2"/>
+              </a:solidFill>
+              <a:prstDash val="solid"/>
+              <a:round/>
+              <a:headEnd len="sm" w="sm" type="none"/>
+              <a:tailEnd len="sm" w="sm" type="none"/>
+            </a:ln>
+          </p:spPr>
+          <p:txBody>
+            <a:bodyPr anchorCtr="0" anchor="ctr" bIns="91425" lIns="91425" spcFirstLastPara="1" rIns="91425" wrap="square" tIns="91425">
+              <a:noAutofit/>
+            </a:bodyPr>
+            <a:lstStyle/>
+            <a:p>
+              <a:pPr indent="0" lvl="0" marL="0" rtl="0" algn="l">
+                <a:spcBef>
+                  <a:spcPts val="0"/>
+                </a:spcBef>
+                <a:spcAft>
+                  <a:spcPts val="0"/>
+                </a:spcAft>
+                <a:buNone/>
+              </a:pPr>
+              <a:r>
+                <a:rPr lang="en" sz="1800"/>
+                <a:t>  a</a:t>
+              </a:r>
+              <a:r>
+                <a:rPr baseline="-25000" lang="en" sz="1800"/>
+                <a:t>5</a:t>
+              </a:r>
+              <a:endParaRPr baseline="-25000" sz="1800"/>
+            </a:p>
+          </p:txBody>
+        </p:sp>
+        <p:sp>
+          <p:nvSpPr>
+            <p:cNvPr id="251" name="Google Shape;251;p36"/>
+            <p:cNvSpPr/>
+            <p:nvPr/>
+          </p:nvSpPr>
+          <p:spPr>
+            <a:xfrm>
+              <a:off x="1317875" y="1422400"/>
+              <a:ext cx="533400" cy="475800"/>
+            </a:xfrm>
+            <a:prstGeom prst="rect">
+              <a:avLst/>
+            </a:prstGeom>
+            <a:solidFill>
+              <a:srgbClr val="D9EAD3"/>
+            </a:solidFill>
+            <a:ln cap="flat" cmpd="sng" w="9525">
+              <a:solidFill>
+                <a:schemeClr val="dk2"/>
+              </a:solidFill>
+              <a:prstDash val="solid"/>
+              <a:round/>
+              <a:headEnd len="sm" w="sm" type="none"/>
+              <a:tailEnd len="sm" w="sm" type="none"/>
+            </a:ln>
+          </p:spPr>
+          <p:txBody>
+            <a:bodyPr anchorCtr="0" anchor="ctr" bIns="91425" lIns="91425" spcFirstLastPara="1" rIns="91425" wrap="square" tIns="91425">
+              <a:noAutofit/>
+            </a:bodyPr>
+            <a:lstStyle/>
+            <a:p>
+              <a:pPr indent="0" lvl="0" marL="0" rtl="0" algn="l">
+                <a:spcBef>
+                  <a:spcPts val="0"/>
+                </a:spcBef>
+                <a:spcAft>
+                  <a:spcPts val="0"/>
+                </a:spcAft>
+                <a:buNone/>
+              </a:pPr>
+              <a:r>
+                <a:rPr lang="en" sz="1800"/>
+                <a:t>  a</a:t>
+              </a:r>
+              <a:r>
+                <a:rPr baseline="-25000" lang="en" sz="1800"/>
+                <a:t>6</a:t>
+              </a:r>
+              <a:endParaRPr baseline="-25000" sz="1800"/>
+            </a:p>
+          </p:txBody>
+        </p:sp>
+        <p:sp>
+          <p:nvSpPr>
+            <p:cNvPr id="252" name="Google Shape;252;p36"/>
+            <p:cNvSpPr/>
+            <p:nvPr/>
+          </p:nvSpPr>
+          <p:spPr>
+            <a:xfrm>
+              <a:off x="1855775" y="1422400"/>
+              <a:ext cx="716100" cy="475800"/>
+            </a:xfrm>
+            <a:prstGeom prst="rect">
+              <a:avLst/>
+            </a:prstGeom>
+            <a:solidFill>
+              <a:srgbClr val="D9EAD3"/>
+            </a:solidFill>
+            <a:ln cap="flat" cmpd="sng" w="9525">
+              <a:solidFill>
+                <a:schemeClr val="dk2"/>
+              </a:solidFill>
+              <a:prstDash val="solid"/>
+              <a:round/>
+              <a:headEnd len="sm" w="sm" type="none"/>
+              <a:tailEnd len="sm" w="sm" type="none"/>
+            </a:ln>
+          </p:spPr>
+          <p:txBody>
+            <a:bodyPr anchorCtr="0" anchor="ctr" bIns="91425" lIns="91425" spcFirstLastPara="1" rIns="91425" wrap="square" tIns="91425">
+              <a:noAutofit/>
+            </a:bodyPr>
+            <a:lstStyle/>
+            <a:p>
+              <a:pPr indent="0" lvl="0" marL="0" rtl="0" algn="l">
+                <a:spcBef>
+                  <a:spcPts val="0"/>
+                </a:spcBef>
+                <a:spcAft>
+                  <a:spcPts val="0"/>
+                </a:spcAft>
+                <a:buNone/>
+              </a:pPr>
+              <a:r>
+                <a:rPr lang="en" sz="1800"/>
+                <a:t>  a</a:t>
+              </a:r>
+              <a:r>
+                <a:rPr baseline="-25000" lang="en" sz="1800"/>
+                <a:t>7</a:t>
+              </a:r>
+              <a:endParaRPr baseline="-25000" sz="1800"/>
+            </a:p>
+          </p:txBody>
+        </p:sp>
+        <p:sp>
+          <p:nvSpPr>
+            <p:cNvPr id="253" name="Google Shape;253;p36"/>
+            <p:cNvSpPr/>
+            <p:nvPr/>
+          </p:nvSpPr>
+          <p:spPr>
+            <a:xfrm>
+              <a:off x="251075" y="1879600"/>
+              <a:ext cx="568200" cy="475800"/>
+            </a:xfrm>
+            <a:prstGeom prst="rect">
+              <a:avLst/>
+            </a:prstGeom>
+            <a:solidFill>
+              <a:srgbClr val="D9EAD3"/>
+            </a:solidFill>
+            <a:ln cap="flat" cmpd="sng" w="9525">
+              <a:solidFill>
+                <a:schemeClr val="dk2"/>
+              </a:solidFill>
+              <a:prstDash val="solid"/>
+              <a:round/>
+              <a:headEnd len="sm" w="sm" type="none"/>
+              <a:tailEnd len="sm" w="sm" type="none"/>
+            </a:ln>
+          </p:spPr>
+          <p:txBody>
+            <a:bodyPr anchorCtr="0" anchor="ctr" bIns="91425" lIns="91425" spcFirstLastPara="1" rIns="91425" wrap="square" tIns="91425">
+              <a:noAutofit/>
+            </a:bodyPr>
+            <a:lstStyle/>
+            <a:p>
+              <a:pPr indent="0" lvl="0" marL="0" rtl="0" algn="l">
+                <a:spcBef>
+                  <a:spcPts val="0"/>
+                </a:spcBef>
+                <a:spcAft>
+                  <a:spcPts val="0"/>
+                </a:spcAft>
+                <a:buNone/>
+              </a:pPr>
+              <a:r>
+                <a:rPr lang="en" sz="1800"/>
+                <a:t>  a</a:t>
+              </a:r>
+              <a:r>
+                <a:rPr baseline="-25000" lang="en" sz="1800"/>
+                <a:t>8</a:t>
+              </a:r>
+              <a:endParaRPr baseline="-25000" sz="1800"/>
+            </a:p>
+          </p:txBody>
+        </p:sp>
+        <p:sp>
+          <p:nvSpPr>
+            <p:cNvPr id="254" name="Google Shape;254;p36"/>
+            <p:cNvSpPr/>
+            <p:nvPr/>
+          </p:nvSpPr>
+          <p:spPr>
+            <a:xfrm>
+              <a:off x="784475" y="1879600"/>
+              <a:ext cx="568200" cy="475800"/>
+            </a:xfrm>
+            <a:prstGeom prst="rect">
+              <a:avLst/>
+            </a:prstGeom>
+            <a:solidFill>
+              <a:srgbClr val="D9EAD3"/>
+            </a:solidFill>
+            <a:ln cap="flat" cmpd="sng" w="9525">
+              <a:solidFill>
+                <a:schemeClr val="dk2"/>
+              </a:solidFill>
+              <a:prstDash val="solid"/>
+              <a:round/>
+              <a:headEnd len="sm" w="sm" type="none"/>
+              <a:tailEnd len="sm" w="sm" type="none"/>
+            </a:ln>
+          </p:spPr>
+          <p:txBody>
+            <a:bodyPr anchorCtr="0" anchor="ctr" bIns="91425" lIns="91425" spcFirstLastPara="1" rIns="91425" wrap="square" tIns="91425">
+              <a:noAutofit/>
+            </a:bodyPr>
+            <a:lstStyle/>
+            <a:p>
+              <a:pPr indent="0" lvl="0" marL="0" rtl="0" algn="l">
+                <a:spcBef>
+                  <a:spcPts val="0"/>
+                </a:spcBef>
+                <a:spcAft>
+                  <a:spcPts val="0"/>
+                </a:spcAft>
+                <a:buNone/>
+              </a:pPr>
+              <a:r>
+                <a:rPr lang="en" sz="1800"/>
+                <a:t>  a</a:t>
+              </a:r>
+              <a:r>
+                <a:rPr baseline="-25000" lang="en" sz="1800"/>
+                <a:t>9</a:t>
+              </a:r>
+              <a:endParaRPr baseline="-25000" sz="1800"/>
+            </a:p>
+          </p:txBody>
+        </p:sp>
+        <p:sp>
+          <p:nvSpPr>
+            <p:cNvPr id="255" name="Google Shape;255;p36"/>
+            <p:cNvSpPr/>
+            <p:nvPr/>
+          </p:nvSpPr>
+          <p:spPr>
+            <a:xfrm>
+              <a:off x="1317875" y="1879600"/>
+              <a:ext cx="639900" cy="475800"/>
+            </a:xfrm>
+            <a:prstGeom prst="rect">
+              <a:avLst/>
+            </a:prstGeom>
+            <a:solidFill>
+              <a:srgbClr val="D9EAD3"/>
+            </a:solidFill>
+            <a:ln cap="flat" cmpd="sng" w="9525">
+              <a:solidFill>
+                <a:schemeClr val="dk2"/>
+              </a:solidFill>
+              <a:prstDash val="solid"/>
+              <a:round/>
+              <a:headEnd len="sm" w="sm" type="none"/>
+              <a:tailEnd len="sm" w="sm" type="none"/>
+            </a:ln>
+          </p:spPr>
+          <p:txBody>
+            <a:bodyPr anchorCtr="0" anchor="ctr" bIns="91425" lIns="91425" spcFirstLastPara="1" rIns="91425" wrap="square" tIns="91425">
+              <a:noAutofit/>
+            </a:bodyPr>
+            <a:lstStyle/>
+            <a:p>
+              <a:pPr indent="0" lvl="0" marL="0" rtl="0" algn="l">
+                <a:spcBef>
+                  <a:spcPts val="0"/>
+                </a:spcBef>
+                <a:spcAft>
+                  <a:spcPts val="0"/>
+                </a:spcAft>
+                <a:buNone/>
+              </a:pPr>
+              <a:r>
+                <a:rPr lang="en" sz="1800"/>
+                <a:t>  a</a:t>
+              </a:r>
+              <a:r>
+                <a:rPr baseline="-25000" lang="en" sz="1800"/>
+                <a:t>10</a:t>
+              </a:r>
+              <a:endParaRPr baseline="-25000" sz="1800"/>
+            </a:p>
+          </p:txBody>
+        </p:sp>
+        <p:sp>
+          <p:nvSpPr>
+            <p:cNvPr id="256" name="Google Shape;256;p36"/>
+            <p:cNvSpPr/>
+            <p:nvPr/>
+          </p:nvSpPr>
+          <p:spPr>
+            <a:xfrm>
+              <a:off x="1851275" y="1879600"/>
+              <a:ext cx="716100" cy="475800"/>
+            </a:xfrm>
+            <a:prstGeom prst="rect">
+              <a:avLst/>
+            </a:prstGeom>
+            <a:solidFill>
+              <a:srgbClr val="D9EAD3"/>
+            </a:solidFill>
+            <a:ln cap="flat" cmpd="sng" w="9525">
+              <a:solidFill>
+                <a:schemeClr val="dk2"/>
+              </a:solidFill>
+              <a:prstDash val="solid"/>
+              <a:round/>
+              <a:headEnd len="sm" w="sm" type="none"/>
+              <a:tailEnd len="sm" w="sm" type="none"/>
+            </a:ln>
+          </p:spPr>
+          <p:txBody>
+            <a:bodyPr anchorCtr="0" anchor="ctr" bIns="91425" lIns="91425" spcFirstLastPara="1" rIns="91425" wrap="square" tIns="91425">
+              <a:noAutofit/>
+            </a:bodyPr>
+            <a:lstStyle/>
+            <a:p>
+              <a:pPr indent="0" lvl="0" marL="0" rtl="0" algn="l">
+                <a:spcBef>
+                  <a:spcPts val="0"/>
+                </a:spcBef>
+                <a:spcAft>
+                  <a:spcPts val="0"/>
+                </a:spcAft>
+                <a:buNone/>
+              </a:pPr>
+              <a:r>
+                <a:rPr lang="en" sz="1800"/>
+                <a:t>  a</a:t>
+              </a:r>
+              <a:r>
+                <a:rPr baseline="-25000" lang="en" sz="1800"/>
+                <a:t>11</a:t>
+              </a:r>
+              <a:endParaRPr baseline="-25000" sz="1800"/>
+            </a:p>
+          </p:txBody>
+        </p:sp>
+      </p:grpSp>
+      <p:sp>
+        <p:nvSpPr>
+          <p:cNvPr id="257" name="Google Shape;257;p36"/>
+          <p:cNvSpPr/>
+          <p:nvPr/>
+        </p:nvSpPr>
+        <p:spPr>
+          <a:xfrm>
+            <a:off x="3564675" y="1421075"/>
+            <a:ext cx="1995300" cy="198300"/>
+          </a:xfrm>
+          <a:prstGeom prst="rightArrow">
+            <a:avLst>
+              <a:gd fmla="val 50000" name="adj1"/>
+              <a:gd fmla="val 50000" name="adj2"/>
+            </a:avLst>
+          </a:prstGeom>
+          <a:solidFill>
+            <a:srgbClr val="FF0000"/>
+          </a:solidFill>
+          <a:ln cap="flat" cmpd="sng" w="9525">
+            <a:solidFill>
+              <a:schemeClr val="dk2"/>
+            </a:solidFill>
+            <a:prstDash val="solid"/>
+            <a:round/>
+            <a:headEnd len="sm" w="sm" type="none"/>
+            <a:tailEnd len="sm" w="sm" type="none"/>
+          </a:ln>
+        </p:spPr>
+        <p:txBody>
+          <a:bodyPr anchorCtr="0" anchor="ctr" bIns="91425" lIns="91425" spcFirstLastPara="1" rIns="91425" wrap="square" tIns="91425">
+            <a:noAutofit/>
+          </a:bodyPr>
+          <a:lstStyle/>
+          <a:p>
+            <a:pPr indent="0" lvl="0" marL="0" rtl="0" algn="l">
+              <a:spcBef>
+                <a:spcPts val="0"/>
+              </a:spcBef>
+              <a:spcAft>
+                <a:spcPts val="0"/>
+              </a:spcAft>
+              <a:buNone/>
+            </a:pPr>
+            <a:r>
+              <a:t/>
+            </a:r>
+            <a:endParaRPr/>
+          </a:p>
+        </p:txBody>
+      </p:sp>
+      <p:sp>
+        <p:nvSpPr>
+          <p:cNvPr id="258" name="Google Shape;258;p36"/>
+          <p:cNvSpPr txBox="1"/>
+          <p:nvPr/>
+        </p:nvSpPr>
+        <p:spPr>
+          <a:xfrm>
+            <a:off x="3323913" y="849800"/>
+            <a:ext cx="2596800" cy="492600"/>
+          </a:xfrm>
+          <a:prstGeom prst="rect">
+            <a:avLst/>
+          </a:prstGeom>
+          <a:noFill/>
+          <a:ln>
+            <a:noFill/>
+          </a:ln>
+        </p:spPr>
+        <p:txBody>
+          <a:bodyPr anchorCtr="0" anchor="t" bIns="91425" lIns="91425" spcFirstLastPara="1" rIns="91425" wrap="square" tIns="91425">
+            <a:spAutoFit/>
+          </a:bodyPr>
+          <a:lstStyle/>
+          <a:p>
+            <a:pPr indent="0" lvl="0" marL="0" rtl="0" algn="l">
+              <a:spcBef>
+                <a:spcPts val="0"/>
+              </a:spcBef>
+              <a:spcAft>
+                <a:spcPts val="0"/>
+              </a:spcAft>
+              <a:buNone/>
+            </a:pPr>
+            <a:r>
+              <a:rPr b="1" lang="en" sz="2000"/>
+              <a:t>Транспонирование</a:t>
+            </a:r>
+            <a:endParaRPr b="1" sz="2000"/>
+          </a:p>
+        </p:txBody>
+      </p:sp>
+      <p:sp>
+        <p:nvSpPr>
+          <p:cNvPr id="259" name="Google Shape;259;p36"/>
+          <p:cNvSpPr txBox="1"/>
+          <p:nvPr/>
+        </p:nvSpPr>
+        <p:spPr>
+          <a:xfrm>
+            <a:off x="1101675" y="2907650"/>
+            <a:ext cx="6921300" cy="800400"/>
+          </a:xfrm>
+          <a:prstGeom prst="rect">
+            <a:avLst/>
+          </a:prstGeom>
+          <a:noFill/>
+          <a:ln>
+            <a:noFill/>
+          </a:ln>
+        </p:spPr>
+        <p:txBody>
+          <a:bodyPr anchorCtr="0" anchor="t" bIns="91425" lIns="91425" spcFirstLastPara="1" rIns="91425" wrap="square" tIns="91425">
+            <a:spAutoFit/>
+          </a:bodyPr>
+          <a:lstStyle/>
+          <a:p>
+            <a:pPr indent="0" lvl="0" marL="0" rtl="0" algn="l">
+              <a:spcBef>
+                <a:spcPts val="0"/>
+              </a:spcBef>
+              <a:spcAft>
+                <a:spcPts val="0"/>
+              </a:spcAft>
+              <a:buClr>
+                <a:schemeClr val="dk1"/>
+              </a:buClr>
+              <a:buSzPts val="1100"/>
+              <a:buFont typeface="Arial"/>
+              <a:buNone/>
+            </a:pPr>
+            <a:r>
+              <a:rPr b="1" lang="en" sz="2000"/>
+              <a:t> n=i/K,    k=i%N - двумерная индексация, матрица.</a:t>
+            </a:r>
+            <a:endParaRPr b="1" sz="2000"/>
+          </a:p>
+          <a:p>
+            <a:pPr indent="0" lvl="0" marL="0" rtl="0" algn="l">
+              <a:spcBef>
+                <a:spcPts val="0"/>
+              </a:spcBef>
+              <a:spcAft>
+                <a:spcPts val="0"/>
+              </a:spcAft>
+              <a:buNone/>
+            </a:pPr>
+            <a:r>
+              <a:rPr b="1" lang="en" sz="2000"/>
+              <a:t> a[k+n*K]  =&gt; a[n+k*N]</a:t>
+            </a:r>
+            <a:endParaRPr b="1"/>
+          </a:p>
+        </p:txBody>
+      </p:sp>
+    </p:spTree>
+  </p:cSld>
+  <p:clrMapOvr>
+    <a:masterClrMapping/>
+  </p:clrMapOvr>
+</p:sld>
+</file>
+
 <file path=ppt/slides/slide3.xml><?xml version="1.0" encoding="utf-8"?>
 <p:sld xmlns:a="http://schemas.openxmlformats.org/drawingml/2006/main" xmlns:r="http://schemas.openxmlformats.org/officeDocument/2006/relationships" xmlns:mc="http://schemas.openxmlformats.org/markup-compatibility/2006" xmlns:mv="urn:schemas-microsoft-com:mac:vml" xmlns:p="http://schemas.openxmlformats.org/presentationml/2006/main" xmlns:c="http://schemas.openxmlformats.org/drawingml/2006/chart" xmlns:dgm="http://schemas.openxmlformats.org/drawingml/2006/diagram" xmlns:o="urn:schemas-microsoft-com:office:office" xmlns:v="urn:schemas-microsoft-com:vml" xmlns:pvml="urn:schemas-microsoft-com:office:powerpoint" xmlns:com="http://schemas.openxmlformats.org/drawingml/2006/compatibility" xmlns:p14="http://schemas.microsoft.com/office/powerpoint/2010/main" xmlns:p15="http://schemas.microsoft.com/office/powerpoint/2012/main" xmlns:ahyp="http://schemas.microsoft.com/office/drawing/2018/hyperlinkcolor">
   <p:cSld>
@@ -20560,9 +24187,9 @@
 </file>
 
 <file path=ppt/theme/theme1.xml><?xml version="1.0" encoding="utf-8"?>
-<a:theme xmlns:a="http://schemas.openxmlformats.org/drawingml/2006/main" xmlns:r="http://schemas.openxmlformats.org/officeDocument/2006/relationships" name="Simple Light">
+<a:theme xmlns:a="http://schemas.openxmlformats.org/drawingml/2006/main" xmlns:r="http://schemas.openxmlformats.org/officeDocument/2006/relationships">
   <a:themeElements>
-    <a:clrScheme name="Simple Light">
+    <a:clrScheme name="Default">
       <a:dk1>
         <a:srgbClr val="000000"/>
       </a:dk1>
@@ -20570,34 +24197,34 @@
         <a:srgbClr val="FFFFFF"/>
       </a:lt1>
       <a:dk2>
-        <a:srgbClr val="595959"/>
+        <a:srgbClr val="158158"/>
       </a:dk2>
       <a:lt2>
-        <a:srgbClr val="EEEEEE"/>
+        <a:srgbClr val="F3F3F3"/>
       </a:lt2>
       <a:accent1>
-        <a:srgbClr val="4285F4"/>
+        <a:srgbClr val="058DC7"/>
       </a:accent1>
       <a:accent2>
-        <a:srgbClr val="212121"/>
+        <a:srgbClr val="50B432"/>
       </a:accent2>
       <a:accent3>
-        <a:srgbClr val="78909C"/>
+        <a:srgbClr val="ED561B"/>
       </a:accent3>
       <a:accent4>
-        <a:srgbClr val="FFAB40"/>
+        <a:srgbClr val="EDEF00"/>
       </a:accent4>
       <a:accent5>
-        <a:srgbClr val="0097A7"/>
+        <a:srgbClr val="24CBE5"/>
       </a:accent5>
       <a:accent6>
-        <a:srgbClr val="EEFF41"/>
+        <a:srgbClr val="64E572"/>
       </a:accent6>
       <a:hlink>
-        <a:srgbClr val="0097A7"/>
+        <a:srgbClr val="2200CC"/>
       </a:hlink>
       <a:folHlink>
-        <a:srgbClr val="0097A7"/>
+        <a:srgbClr val="551A8B"/>
       </a:folHlink>
     </a:clrScheme>
     <a:fontScheme name="Office">
@@ -21118,9 +24745,9 @@
 </file>
 
 <file path=ppt/theme/theme3.xml><?xml version="1.0" encoding="utf-8"?>
-<a:theme xmlns:a="http://schemas.openxmlformats.org/drawingml/2006/main" xmlns:r="http://schemas.openxmlformats.org/officeDocument/2006/relationships">
+<a:theme xmlns:a="http://schemas.openxmlformats.org/drawingml/2006/main" xmlns:r="http://schemas.openxmlformats.org/officeDocument/2006/relationships" name="Simple Light">
   <a:themeElements>
-    <a:clrScheme name="Default">
+    <a:clrScheme name="Simple Light">
       <a:dk1>
         <a:srgbClr val="000000"/>
       </a:dk1>
@@ -21128,34 +24755,34 @@
         <a:srgbClr val="FFFFFF"/>
       </a:lt1>
       <a:dk2>
-        <a:srgbClr val="158158"/>
+        <a:srgbClr val="595959"/>
       </a:dk2>
       <a:lt2>
-        <a:srgbClr val="F3F3F3"/>
+        <a:srgbClr val="EEEEEE"/>
       </a:lt2>
       <a:accent1>
-        <a:srgbClr val="058DC7"/>
+        <a:srgbClr val="4285F4"/>
       </a:accent1>
       <a:accent2>
-        <a:srgbClr val="50B432"/>
+        <a:srgbClr val="212121"/>
       </a:accent2>
       <a:accent3>
-        <a:srgbClr val="ED561B"/>
+        <a:srgbClr val="78909C"/>
       </a:accent3>
       <a:accent4>
-        <a:srgbClr val="EDEF00"/>
+        <a:srgbClr val="FFAB40"/>
       </a:accent4>
       <a:accent5>
-        <a:srgbClr val="24CBE5"/>
+        <a:srgbClr val="0097A7"/>
       </a:accent5>
       <a:accent6>
-        <a:srgbClr val="64E572"/>
+        <a:srgbClr val="EEFF41"/>
       </a:accent6>
       <a:hlink>
-        <a:srgbClr val="2200CC"/>
+        <a:srgbClr val="0097A7"/>
       </a:hlink>
       <a:folHlink>
-        <a:srgbClr val="551A8B"/>
+        <a:srgbClr val="0097A7"/>
       </a:folHlink>
     </a:clrScheme>
     <a:fontScheme name="Office">
